--- a/presentation/tutorful_feb2026_business_summary.pptx
+++ b/presentation/tutorful_feb2026_business_summary.pptx
@@ -4,8 +4,13 @@
   <p:sldMasterIdLst>
     <p:sldMasterId id="2147483648" r:id="rId1"/>
   </p:sldMasterIdLst>
+  <p:notesMasterIdLst>
+    <p:notesMasterId r:id="rId5"/>
+  </p:notesMasterIdLst>
   <p:sldIdLst>
     <p:sldId id="256" r:id="rId2"/>
+    <p:sldId id="258" r:id="rId3"/>
+    <p:sldId id="257" r:id="rId4"/>
   </p:sldIdLst>
   <p:sldSz cx="12192000" cy="6858000"/>
   <p:notesSz cx="6858000" cy="9144000"/>
@@ -123,6 +128,462 @@
 </p:presentation>
 </file>
 
+<file path=ppt/notesMasters/notesMaster1.xml><?xml version="1.0" encoding="utf-8"?>
+<p:notesMaster xmlns:a="http://schemas.openxmlformats.org/drawingml/2006/main" xmlns:r="http://schemas.openxmlformats.org/officeDocument/2006/relationships" xmlns:p="http://schemas.openxmlformats.org/presentationml/2006/main">
+  <p:cSld>
+    <p:bg>
+      <p:bgRef idx="1001">
+        <a:schemeClr val="bg1"/>
+      </p:bgRef>
+    </p:bg>
+    <p:spTree>
+      <p:nvGrpSpPr>
+        <p:cNvPr id="1" name=""/>
+        <p:cNvGrpSpPr/>
+        <p:nvPr/>
+      </p:nvGrpSpPr>
+      <p:grpSpPr>
+        <a:xfrm>
+          <a:off x="0" y="0"/>
+          <a:ext cx="0" cy="0"/>
+          <a:chOff x="0" y="0"/>
+          <a:chExt cx="0" cy="0"/>
+        </a:xfrm>
+      </p:grpSpPr>
+      <p:sp>
+        <p:nvSpPr>
+          <p:cNvPr id="2" name="Header Placeholder 1"/>
+          <p:cNvSpPr>
+            <a:spLocks noGrp="1"/>
+          </p:cNvSpPr>
+          <p:nvPr>
+            <p:ph type="hdr" sz="quarter"/>
+          </p:nvPr>
+        </p:nvSpPr>
+        <p:spPr>
+          <a:xfrm>
+            <a:off x="0" y="0"/>
+            <a:ext cx="2971800" cy="458788"/>
+          </a:xfrm>
+          <a:prstGeom prst="rect">
+            <a:avLst/>
+          </a:prstGeom>
+        </p:spPr>
+        <p:txBody>
+          <a:bodyPr vert="horz" lIns="91440" tIns="45720" rIns="91440" bIns="45720" rtlCol="0"/>
+          <a:lstStyle>
+            <a:lvl1pPr algn="l">
+              <a:defRPr sz="1200"/>
+            </a:lvl1pPr>
+          </a:lstStyle>
+          <a:p>
+            <a:endParaRPr lang="en-GB"/>
+          </a:p>
+        </p:txBody>
+      </p:sp>
+      <p:sp>
+        <p:nvSpPr>
+          <p:cNvPr id="3" name="Date Placeholder 2"/>
+          <p:cNvSpPr>
+            <a:spLocks noGrp="1"/>
+          </p:cNvSpPr>
+          <p:nvPr>
+            <p:ph type="dt" idx="1"/>
+          </p:nvPr>
+        </p:nvSpPr>
+        <p:spPr>
+          <a:xfrm>
+            <a:off x="3884613" y="0"/>
+            <a:ext cx="2971800" cy="458788"/>
+          </a:xfrm>
+          <a:prstGeom prst="rect">
+            <a:avLst/>
+          </a:prstGeom>
+        </p:spPr>
+        <p:txBody>
+          <a:bodyPr vert="horz" lIns="91440" tIns="45720" rIns="91440" bIns="45720" rtlCol="0"/>
+          <a:lstStyle>
+            <a:lvl1pPr algn="r">
+              <a:defRPr sz="1200"/>
+            </a:lvl1pPr>
+          </a:lstStyle>
+          <a:p>
+            <a:fld id="{CCDEF3CF-3C31-8F4F-963F-441BEB6F9F84}" type="datetimeFigureOut">
+              <a:rPr lang="en-GB" smtClean="0"/>
+              <a:t>20/04/2026</a:t>
+            </a:fld>
+            <a:endParaRPr lang="en-GB"/>
+          </a:p>
+        </p:txBody>
+      </p:sp>
+      <p:sp>
+        <p:nvSpPr>
+          <p:cNvPr id="4" name="Slide Image Placeholder 3"/>
+          <p:cNvSpPr>
+            <a:spLocks noGrp="1" noRot="1" noChangeAspect="1"/>
+          </p:cNvSpPr>
+          <p:nvPr>
+            <p:ph type="sldImg" idx="2"/>
+          </p:nvPr>
+        </p:nvSpPr>
+        <p:spPr>
+          <a:xfrm>
+            <a:off x="685800" y="1143000"/>
+            <a:ext cx="5486400" cy="3086100"/>
+          </a:xfrm>
+          <a:prstGeom prst="rect">
+            <a:avLst/>
+          </a:prstGeom>
+          <a:noFill/>
+          <a:ln w="12700">
+            <a:solidFill>
+              <a:prstClr val="black"/>
+            </a:solidFill>
+          </a:ln>
+        </p:spPr>
+        <p:txBody>
+          <a:bodyPr vert="horz" lIns="91440" tIns="45720" rIns="91440" bIns="45720" rtlCol="0" anchor="ctr"/>
+          <a:lstStyle/>
+          <a:p>
+            <a:endParaRPr lang="en-GB"/>
+          </a:p>
+        </p:txBody>
+      </p:sp>
+      <p:sp>
+        <p:nvSpPr>
+          <p:cNvPr id="5" name="Notes Placeholder 4"/>
+          <p:cNvSpPr>
+            <a:spLocks noGrp="1"/>
+          </p:cNvSpPr>
+          <p:nvPr>
+            <p:ph type="body" sz="quarter" idx="3"/>
+          </p:nvPr>
+        </p:nvSpPr>
+        <p:spPr>
+          <a:xfrm>
+            <a:off x="685800" y="4400550"/>
+            <a:ext cx="5486400" cy="3600450"/>
+          </a:xfrm>
+          <a:prstGeom prst="rect">
+            <a:avLst/>
+          </a:prstGeom>
+        </p:spPr>
+        <p:txBody>
+          <a:bodyPr vert="horz" lIns="91440" tIns="45720" rIns="91440" bIns="45720" rtlCol="0"/>
+          <a:lstStyle/>
+          <a:p>
+            <a:pPr lvl="0"/>
+            <a:r>
+              <a:rPr lang="en-GB"/>
+              <a:t>Click to edit Master text styles</a:t>
+            </a:r>
+          </a:p>
+          <a:p>
+            <a:pPr lvl="1"/>
+            <a:r>
+              <a:rPr lang="en-GB"/>
+              <a:t>Second level</a:t>
+            </a:r>
+          </a:p>
+          <a:p>
+            <a:pPr lvl="2"/>
+            <a:r>
+              <a:rPr lang="en-GB"/>
+              <a:t>Third level</a:t>
+            </a:r>
+          </a:p>
+          <a:p>
+            <a:pPr lvl="3"/>
+            <a:r>
+              <a:rPr lang="en-GB"/>
+              <a:t>Fourth level</a:t>
+            </a:r>
+          </a:p>
+          <a:p>
+            <a:pPr lvl="4"/>
+            <a:r>
+              <a:rPr lang="en-GB"/>
+              <a:t>Fifth level</a:t>
+            </a:r>
+          </a:p>
+        </p:txBody>
+      </p:sp>
+      <p:sp>
+        <p:nvSpPr>
+          <p:cNvPr id="6" name="Footer Placeholder 5"/>
+          <p:cNvSpPr>
+            <a:spLocks noGrp="1"/>
+          </p:cNvSpPr>
+          <p:nvPr>
+            <p:ph type="ftr" sz="quarter" idx="4"/>
+          </p:nvPr>
+        </p:nvSpPr>
+        <p:spPr>
+          <a:xfrm>
+            <a:off x="0" y="8685213"/>
+            <a:ext cx="2971800" cy="458787"/>
+          </a:xfrm>
+          <a:prstGeom prst="rect">
+            <a:avLst/>
+          </a:prstGeom>
+        </p:spPr>
+        <p:txBody>
+          <a:bodyPr vert="horz" lIns="91440" tIns="45720" rIns="91440" bIns="45720" rtlCol="0" anchor="b"/>
+          <a:lstStyle>
+            <a:lvl1pPr algn="l">
+              <a:defRPr sz="1200"/>
+            </a:lvl1pPr>
+          </a:lstStyle>
+          <a:p>
+            <a:endParaRPr lang="en-GB"/>
+          </a:p>
+        </p:txBody>
+      </p:sp>
+      <p:sp>
+        <p:nvSpPr>
+          <p:cNvPr id="7" name="Slide Number Placeholder 6"/>
+          <p:cNvSpPr>
+            <a:spLocks noGrp="1"/>
+          </p:cNvSpPr>
+          <p:nvPr>
+            <p:ph type="sldNum" sz="quarter" idx="5"/>
+          </p:nvPr>
+        </p:nvSpPr>
+        <p:spPr>
+          <a:xfrm>
+            <a:off x="3884613" y="8685213"/>
+            <a:ext cx="2971800" cy="458787"/>
+          </a:xfrm>
+          <a:prstGeom prst="rect">
+            <a:avLst/>
+          </a:prstGeom>
+        </p:spPr>
+        <p:txBody>
+          <a:bodyPr vert="horz" lIns="91440" tIns="45720" rIns="91440" bIns="45720" rtlCol="0" anchor="b"/>
+          <a:lstStyle>
+            <a:lvl1pPr algn="r">
+              <a:defRPr sz="1200"/>
+            </a:lvl1pPr>
+          </a:lstStyle>
+          <a:p>
+            <a:fld id="{233A7249-D577-924C-B140-560341FFEAD7}" type="slidenum">
+              <a:rPr lang="en-GB" smtClean="0"/>
+              <a:t>‹#›</a:t>
+            </a:fld>
+            <a:endParaRPr lang="en-GB"/>
+          </a:p>
+        </p:txBody>
+      </p:sp>
+    </p:spTree>
+    <p:extLst>
+      <p:ext uri="{BB962C8B-B14F-4D97-AF65-F5344CB8AC3E}">
+        <p14:creationId xmlns:p14="http://schemas.microsoft.com/office/powerpoint/2010/main" val="4201779442"/>
+      </p:ext>
+    </p:extLst>
+  </p:cSld>
+  <p:clrMap bg1="lt1" tx1="dk1" bg2="lt2" tx2="dk2" accent1="accent1" accent2="accent2" accent3="accent3" accent4="accent4" accent5="accent5" accent6="accent6" hlink="hlink" folHlink="folHlink"/>
+  <p:notesStyle>
+    <a:lvl1pPr marL="0" algn="l" defTabSz="914400" rtl="0" eaLnBrk="1" latinLnBrk="0" hangingPunct="1">
+      <a:defRPr sz="1200" kern="1200">
+        <a:solidFill>
+          <a:schemeClr val="tx1"/>
+        </a:solidFill>
+        <a:latin typeface="+mn-lt"/>
+        <a:ea typeface="+mn-ea"/>
+        <a:cs typeface="+mn-cs"/>
+      </a:defRPr>
+    </a:lvl1pPr>
+    <a:lvl2pPr marL="457200" algn="l" defTabSz="914400" rtl="0" eaLnBrk="1" latinLnBrk="0" hangingPunct="1">
+      <a:defRPr sz="1200" kern="1200">
+        <a:solidFill>
+          <a:schemeClr val="tx1"/>
+        </a:solidFill>
+        <a:latin typeface="+mn-lt"/>
+        <a:ea typeface="+mn-ea"/>
+        <a:cs typeface="+mn-cs"/>
+      </a:defRPr>
+    </a:lvl2pPr>
+    <a:lvl3pPr marL="914400" algn="l" defTabSz="914400" rtl="0" eaLnBrk="1" latinLnBrk="0" hangingPunct="1">
+      <a:defRPr sz="1200" kern="1200">
+        <a:solidFill>
+          <a:schemeClr val="tx1"/>
+        </a:solidFill>
+        <a:latin typeface="+mn-lt"/>
+        <a:ea typeface="+mn-ea"/>
+        <a:cs typeface="+mn-cs"/>
+      </a:defRPr>
+    </a:lvl3pPr>
+    <a:lvl4pPr marL="1371600" algn="l" defTabSz="914400" rtl="0" eaLnBrk="1" latinLnBrk="0" hangingPunct="1">
+      <a:defRPr sz="1200" kern="1200">
+        <a:solidFill>
+          <a:schemeClr val="tx1"/>
+        </a:solidFill>
+        <a:latin typeface="+mn-lt"/>
+        <a:ea typeface="+mn-ea"/>
+        <a:cs typeface="+mn-cs"/>
+      </a:defRPr>
+    </a:lvl4pPr>
+    <a:lvl5pPr marL="1828800" algn="l" defTabSz="914400" rtl="0" eaLnBrk="1" latinLnBrk="0" hangingPunct="1">
+      <a:defRPr sz="1200" kern="1200">
+        <a:solidFill>
+          <a:schemeClr val="tx1"/>
+        </a:solidFill>
+        <a:latin typeface="+mn-lt"/>
+        <a:ea typeface="+mn-ea"/>
+        <a:cs typeface="+mn-cs"/>
+      </a:defRPr>
+    </a:lvl5pPr>
+    <a:lvl6pPr marL="2286000" algn="l" defTabSz="914400" rtl="0" eaLnBrk="1" latinLnBrk="0" hangingPunct="1">
+      <a:defRPr sz="1200" kern="1200">
+        <a:solidFill>
+          <a:schemeClr val="tx1"/>
+        </a:solidFill>
+        <a:latin typeface="+mn-lt"/>
+        <a:ea typeface="+mn-ea"/>
+        <a:cs typeface="+mn-cs"/>
+      </a:defRPr>
+    </a:lvl6pPr>
+    <a:lvl7pPr marL="2743200" algn="l" defTabSz="914400" rtl="0" eaLnBrk="1" latinLnBrk="0" hangingPunct="1">
+      <a:defRPr sz="1200" kern="1200">
+        <a:solidFill>
+          <a:schemeClr val="tx1"/>
+        </a:solidFill>
+        <a:latin typeface="+mn-lt"/>
+        <a:ea typeface="+mn-ea"/>
+        <a:cs typeface="+mn-cs"/>
+      </a:defRPr>
+    </a:lvl7pPr>
+    <a:lvl8pPr marL="3200400" algn="l" defTabSz="914400" rtl="0" eaLnBrk="1" latinLnBrk="0" hangingPunct="1">
+      <a:defRPr sz="1200" kern="1200">
+        <a:solidFill>
+          <a:schemeClr val="tx1"/>
+        </a:solidFill>
+        <a:latin typeface="+mn-lt"/>
+        <a:ea typeface="+mn-ea"/>
+        <a:cs typeface="+mn-cs"/>
+      </a:defRPr>
+    </a:lvl8pPr>
+    <a:lvl9pPr marL="3657600" algn="l" defTabSz="914400" rtl="0" eaLnBrk="1" latinLnBrk="0" hangingPunct="1">
+      <a:defRPr sz="1200" kern="1200">
+        <a:solidFill>
+          <a:schemeClr val="tx1"/>
+        </a:solidFill>
+        <a:latin typeface="+mn-lt"/>
+        <a:ea typeface="+mn-ea"/>
+        <a:cs typeface="+mn-cs"/>
+      </a:defRPr>
+    </a:lvl9pPr>
+  </p:notesStyle>
+</p:notesMaster>
+</file>
+
+<file path=ppt/notesSlides/notesSlide1.xml><?xml version="1.0" encoding="utf-8"?>
+<p:notes xmlns:a="http://schemas.openxmlformats.org/drawingml/2006/main" xmlns:r="http://schemas.openxmlformats.org/officeDocument/2006/relationships" xmlns:p="http://schemas.openxmlformats.org/presentationml/2006/main">
+  <p:cSld>
+    <p:spTree>
+      <p:nvGrpSpPr>
+        <p:cNvPr id="1" name=""/>
+        <p:cNvGrpSpPr/>
+        <p:nvPr/>
+      </p:nvGrpSpPr>
+      <p:grpSpPr>
+        <a:xfrm>
+          <a:off x="0" y="0"/>
+          <a:ext cx="0" cy="0"/>
+          <a:chOff x="0" y="0"/>
+          <a:chExt cx="0" cy="0"/>
+        </a:xfrm>
+      </p:grpSpPr>
+      <p:sp>
+        <p:nvSpPr>
+          <p:cNvPr id="2" name="Slide Image Placeholder 1"/>
+          <p:cNvSpPr>
+            <a:spLocks noGrp="1" noRot="1" noChangeAspect="1"/>
+          </p:cNvSpPr>
+          <p:nvPr>
+            <p:ph type="sldImg"/>
+          </p:nvPr>
+        </p:nvSpPr>
+        <p:spPr/>
+      </p:sp>
+      <p:sp>
+        <p:nvSpPr>
+          <p:cNvPr id="3" name="Notes Placeholder 2"/>
+          <p:cNvSpPr>
+            <a:spLocks noGrp="1"/>
+          </p:cNvSpPr>
+          <p:nvPr>
+            <p:ph type="body" idx="1"/>
+          </p:nvPr>
+        </p:nvSpPr>
+        <p:spPr/>
+        <p:txBody>
+          <a:bodyPr/>
+          <a:lstStyle/>
+          <a:p>
+            <a:pPr marL="0" marR="0" lvl="0" indent="0" algn="l" defTabSz="914400" rtl="0" eaLnBrk="1" fontAlgn="auto" latinLnBrk="0" hangingPunct="1">
+              <a:lnSpc>
+                <a:spcPct val="100000"/>
+              </a:lnSpc>
+              <a:spcBef>
+                <a:spcPts val="0"/>
+              </a:spcBef>
+              <a:spcAft>
+                <a:spcPts val="0"/>
+              </a:spcAft>
+              <a:buClrTx/>
+              <a:buSzTx/>
+              <a:buFontTx/>
+              <a:buNone/>
+              <a:tabLst/>
+              <a:defRPr/>
+            </a:pPr>
+            <a:r>
+              <a:rPr lang="en-GB" dirty="0"/>
+              <a:t>Tenure means how long a student has been active at the point of churn or reactivation, measured from their first completed lesson. In this analysis, 'new' is under 90 days and 'established' is 90+ days.</a:t>
+            </a:r>
+          </a:p>
+          <a:p>
+            <a:endParaRPr lang="en-GB" dirty="0"/>
+          </a:p>
+        </p:txBody>
+      </p:sp>
+      <p:sp>
+        <p:nvSpPr>
+          <p:cNvPr id="4" name="Slide Number Placeholder 3"/>
+          <p:cNvSpPr>
+            <a:spLocks noGrp="1"/>
+          </p:cNvSpPr>
+          <p:nvPr>
+            <p:ph type="sldNum" sz="quarter" idx="5"/>
+          </p:nvPr>
+        </p:nvSpPr>
+        <p:spPr/>
+        <p:txBody>
+          <a:bodyPr/>
+          <a:lstStyle/>
+          <a:p>
+            <a:fld id="{233A7249-D577-924C-B140-560341FFEAD7}" type="slidenum">
+              <a:rPr lang="en-GB" smtClean="0"/>
+              <a:t>2</a:t>
+            </a:fld>
+            <a:endParaRPr lang="en-GB"/>
+          </a:p>
+        </p:txBody>
+      </p:sp>
+    </p:spTree>
+    <p:extLst>
+      <p:ext uri="{BB962C8B-B14F-4D97-AF65-F5344CB8AC3E}">
+        <p14:creationId xmlns:p14="http://schemas.microsoft.com/office/powerpoint/2010/main" val="2601242977"/>
+      </p:ext>
+    </p:extLst>
+  </p:cSld>
+  <p:clrMapOvr>
+    <a:masterClrMapping/>
+  </p:clrMapOvr>
+</p:notes>
+</file>
+
 <file path=ppt/slideLayouts/slideLayout1.xml><?xml version="1.0" encoding="utf-8"?>
 <p:sldLayout xmlns:a="http://schemas.openxmlformats.org/drawingml/2006/main" xmlns:r="http://schemas.openxmlformats.org/officeDocument/2006/relationships" xmlns:p="http://schemas.openxmlformats.org/presentationml/2006/main" type="title" preserve="1">
   <p:cSld name="Title Slide">
@@ -302,7 +763,7 @@
           <a:p>
             <a:fld id="{5BCAD085-E8A6-8845-BD4E-CB4CCA059FC4}" type="datetimeFigureOut">
               <a:rPr lang="en-US" smtClean="0"/>
-              <a:t>4/19/26</a:t>
+              <a:t>4/20/26</a:t>
             </a:fld>
             <a:endParaRPr lang="en-US"/>
           </a:p>
@@ -470,7 +931,7 @@
           <a:p>
             <a:fld id="{5BCAD085-E8A6-8845-BD4E-CB4CCA059FC4}" type="datetimeFigureOut">
               <a:rPr lang="en-US" smtClean="0"/>
-              <a:t>4/19/26</a:t>
+              <a:t>4/20/26</a:t>
             </a:fld>
             <a:endParaRPr lang="en-US"/>
           </a:p>
@@ -648,7 +1109,7 @@
           <a:p>
             <a:fld id="{5BCAD085-E8A6-8845-BD4E-CB4CCA059FC4}" type="datetimeFigureOut">
               <a:rPr lang="en-US" smtClean="0"/>
-              <a:t>4/19/26</a:t>
+              <a:t>4/20/26</a:t>
             </a:fld>
             <a:endParaRPr lang="en-US"/>
           </a:p>
@@ -816,7 +1277,7 @@
           <a:p>
             <a:fld id="{5BCAD085-E8A6-8845-BD4E-CB4CCA059FC4}" type="datetimeFigureOut">
               <a:rPr lang="en-US" smtClean="0"/>
-              <a:t>4/19/26</a:t>
+              <a:t>4/20/26</a:t>
             </a:fld>
             <a:endParaRPr lang="en-US"/>
           </a:p>
@@ -1061,7 +1522,7 @@
           <a:p>
             <a:fld id="{5BCAD085-E8A6-8845-BD4E-CB4CCA059FC4}" type="datetimeFigureOut">
               <a:rPr lang="en-US" smtClean="0"/>
-              <a:t>4/19/26</a:t>
+              <a:t>4/20/26</a:t>
             </a:fld>
             <a:endParaRPr lang="en-US"/>
           </a:p>
@@ -1346,7 +1807,7 @@
           <a:p>
             <a:fld id="{5BCAD085-E8A6-8845-BD4E-CB4CCA059FC4}" type="datetimeFigureOut">
               <a:rPr lang="en-US" smtClean="0"/>
-              <a:t>4/19/26</a:t>
+              <a:t>4/20/26</a:t>
             </a:fld>
             <a:endParaRPr lang="en-US"/>
           </a:p>
@@ -1765,7 +2226,7 @@
           <a:p>
             <a:fld id="{5BCAD085-E8A6-8845-BD4E-CB4CCA059FC4}" type="datetimeFigureOut">
               <a:rPr lang="en-US" smtClean="0"/>
-              <a:t>4/19/26</a:t>
+              <a:t>4/20/26</a:t>
             </a:fld>
             <a:endParaRPr lang="en-US"/>
           </a:p>
@@ -1882,7 +2343,7 @@
           <a:p>
             <a:fld id="{5BCAD085-E8A6-8845-BD4E-CB4CCA059FC4}" type="datetimeFigureOut">
               <a:rPr lang="en-US" smtClean="0"/>
-              <a:t>4/19/26</a:t>
+              <a:t>4/20/26</a:t>
             </a:fld>
             <a:endParaRPr lang="en-US"/>
           </a:p>
@@ -1977,7 +2438,7 @@
           <a:p>
             <a:fld id="{5BCAD085-E8A6-8845-BD4E-CB4CCA059FC4}" type="datetimeFigureOut">
               <a:rPr lang="en-US" smtClean="0"/>
-              <a:t>4/19/26</a:t>
+              <a:t>4/20/26</a:t>
             </a:fld>
             <a:endParaRPr lang="en-US"/>
           </a:p>
@@ -2252,7 +2713,7 @@
           <a:p>
             <a:fld id="{5BCAD085-E8A6-8845-BD4E-CB4CCA059FC4}" type="datetimeFigureOut">
               <a:rPr lang="en-US" smtClean="0"/>
-              <a:t>4/19/26</a:t>
+              <a:t>4/20/26</a:t>
             </a:fld>
             <a:endParaRPr lang="en-US"/>
           </a:p>
@@ -2504,7 +2965,7 @@
           <a:p>
             <a:fld id="{5BCAD085-E8A6-8845-BD4E-CB4CCA059FC4}" type="datetimeFigureOut">
               <a:rPr lang="en-US" smtClean="0"/>
-              <a:t>4/19/26</a:t>
+              <a:t>4/20/26</a:t>
             </a:fld>
             <a:endParaRPr lang="en-US"/>
           </a:p>
@@ -2715,7 +3176,7 @@
           <a:p>
             <a:fld id="{5BCAD085-E8A6-8845-BD4E-CB4CCA059FC4}" type="datetimeFigureOut">
               <a:rPr lang="en-US" smtClean="0"/>
-              <a:t>4/19/26</a:t>
+              <a:t>4/20/26</a:t>
             </a:fld>
             <a:endParaRPr lang="en-US"/>
           </a:p>
@@ -3179,41 +3640,6 @@
       </p:sp>
       <p:sp>
         <p:nvSpPr>
-          <p:cNvPr id="4" name="TextBox 3"/>
-          <p:cNvSpPr txBox="1"/>
-          <p:nvPr/>
-        </p:nvSpPr>
-        <p:spPr>
-          <a:xfrm>
-            <a:off x="429768" y="868680"/>
-            <a:ext cx="8046720" cy="411480"/>
-          </a:xfrm>
-          <a:prstGeom prst="rect">
-            <a:avLst/>
-          </a:prstGeom>
-          <a:noFill/>
-        </p:spPr>
-        <p:txBody>
-          <a:bodyPr wrap="none">
-            <a:spAutoFit/>
-          </a:bodyPr>
-          <a:lstStyle/>
-          <a:p>
-            <a:pPr>
-              <a:defRPr sz="1200">
-                <a:solidFill>
-                  <a:srgbClr val="485563"/>
-                </a:solidFill>
-              </a:defRPr>
-            </a:pPr>
-            <a:r>
-              <a:t>Built in dbt using a raw &gt; staging &gt; curated pipeline on BigQuery</a:t>
-            </a:r>
-          </a:p>
-        </p:txBody>
-      </p:sp>
-      <p:sp>
-        <p:nvSpPr>
           <p:cNvPr id="5" name="Rounded Rectangle 4"/>
           <p:cNvSpPr/>
           <p:nvPr/>
@@ -3313,7 +3739,7 @@
         <p:spPr>
           <a:xfrm>
             <a:off x="685800" y="1572768"/>
-            <a:ext cx="2560320" cy="274320"/>
+            <a:ext cx="968920" cy="369332"/>
           </a:xfrm>
           <a:prstGeom prst="rect">
             <a:avLst/>
@@ -3334,8 +3760,10 @@
               </a:defRPr>
             </a:pPr>
             <a:r>
-              <a:t>What was done</a:t>
-            </a:r>
+              <a:rPr lang="en-GB" dirty="0"/>
+              <a:t>Process:</a:t>
+            </a:r>
+            <a:endParaRPr dirty="0"/>
           </a:p>
         </p:txBody>
       </p:sp>
@@ -3347,8 +3775,8 @@
         </p:nvSpPr>
         <p:spPr>
           <a:xfrm>
-            <a:off x="713232" y="1920240"/>
-            <a:ext cx="4663440" cy="2182649"/>
+            <a:off x="713232" y="2130552"/>
+            <a:ext cx="4663440" cy="3041858"/>
           </a:xfrm>
           <a:prstGeom prst="rect">
             <a:avLst/>
@@ -3374,8 +3802,20 @@
               </a:defRPr>
             </a:pPr>
             <a:r>
+              <a:rPr lang="en-GB" b="1" i="1" dirty="0"/>
+              <a:t>Raw</a:t>
+            </a:r>
+            <a:r>
+              <a:rPr lang="en-GB" dirty="0"/>
+              <a:t>: i</a:t>
+            </a:r>
+            <a:r>
+              <a:rPr dirty="0" err="1"/>
+              <a:t>ngested</a:t>
+            </a:r>
+            <a:r>
               <a:rPr dirty="0"/>
-              <a:t>Ingested CSV files into </a:t>
+              <a:t> CSV files into </a:t>
             </a:r>
             <a:r>
               <a:rPr dirty="0" err="1"/>
@@ -3386,12 +3826,16 @@
               <a:t> with </a:t>
             </a:r>
             <a:r>
-              <a:rPr dirty="0" err="1"/>
+              <a:rPr b="1" dirty="0" err="1"/>
               <a:t>dbt</a:t>
             </a:r>
             <a:r>
+              <a:rPr b="1" dirty="0"/>
+              <a:t> seed </a:t>
+            </a:r>
+            <a:r>
               <a:rPr dirty="0"/>
-              <a:t> seed in </a:t>
+              <a:t>in </a:t>
             </a:r>
             <a:r>
               <a:rPr dirty="0" err="1"/>
@@ -3416,8 +3860,16 @@
               </a:defRPr>
             </a:pPr>
             <a:r>
+              <a:rPr lang="en-GB" b="1" i="1" dirty="0"/>
+              <a:t>Staging</a:t>
+            </a:r>
+            <a:r>
+              <a:rPr lang="en-GB" dirty="0"/>
+              <a:t>: s</a:t>
+            </a:r>
+            <a:r>
               <a:rPr dirty="0" err="1"/>
-              <a:t>Standardised</a:t>
+              <a:t>tandardised</a:t>
             </a:r>
             <a:r>
               <a:rPr dirty="0"/>
@@ -3429,7 +3881,23 @@
             </a:r>
             <a:r>
               <a:rPr dirty="0"/>
-              <a:t>, including type casting and timestamp parsing.</a:t>
+              <a:t>, including </a:t>
+            </a:r>
+            <a:r>
+              <a:rPr b="1" dirty="0"/>
+              <a:t>type casting </a:t>
+            </a:r>
+            <a:r>
+              <a:rPr dirty="0"/>
+              <a:t>and</a:t>
+            </a:r>
+            <a:r>
+              <a:rPr b="1" dirty="0"/>
+              <a:t> timestamp parsing</a:t>
+            </a:r>
+            <a:r>
+              <a:rPr dirty="0"/>
+              <a:t>.</a:t>
             </a:r>
           </a:p>
           <a:p>
@@ -3446,17 +3914,21 @@
               </a:defRPr>
             </a:pPr>
             <a:r>
-              <a:rPr dirty="0"/>
-              <a:t>Created curated models to derive completed-lesson activity, student lesson gaps, and lifecycle events.</a:t>
-            </a:r>
-          </a:p>
-          <a:p>
-            <a:pPr marL="342900" indent="-342900">
+              <a:rPr lang="en-GB" b="1" i="1" dirty="0"/>
+              <a:t>Curated</a:t>
+            </a:r>
+            <a:r>
+              <a:rPr lang="en-GB" dirty="0"/>
+              <a:t>: </a:t>
+            </a:r>
+          </a:p>
+          <a:p>
+            <a:pPr marL="800100" lvl="1" indent="-342900">
               <a:spcAft>
                 <a:spcPts val="700"/>
               </a:spcAft>
-              <a:buFont typeface="+mj-lt"/>
-              <a:buAutoNum type="arabicPeriod"/>
+              <a:buFont typeface="Arial" panose="020B0604020202020204" pitchFamily="34" charset="0"/>
+              <a:buChar char="•"/>
               <a:defRPr sz="1250">
                 <a:solidFill>
                   <a:srgbClr val="485563"/>
@@ -3465,16 +3937,50 @@
             </a:pPr>
             <a:r>
               <a:rPr dirty="0"/>
-              <a:t>Defined churn as 30 days without a completed lesson and reactivation as a new completed lesson after a 30-day gap.</a:t>
-            </a:r>
-          </a:p>
-          <a:p>
-            <a:pPr marL="342900" indent="-342900">
+              <a:t>Created curated models to derive </a:t>
+            </a:r>
+            <a:r>
+              <a:rPr b="1" dirty="0"/>
+              <a:t>completed-lesson activity</a:t>
+            </a:r>
+            <a:r>
+              <a:rPr dirty="0"/>
+              <a:t>, student </a:t>
+            </a:r>
+            <a:r>
+              <a:rPr b="1" dirty="0"/>
+              <a:t>lesson gaps</a:t>
+            </a:r>
+            <a:r>
+              <a:rPr dirty="0"/>
+              <a:t>, and lifecycle events.</a:t>
+            </a:r>
+          </a:p>
+          <a:p>
+            <a:pPr marL="800100" lvl="1" indent="-342900">
               <a:spcAft>
                 <a:spcPts val="700"/>
               </a:spcAft>
-              <a:buFont typeface="+mj-lt"/>
-              <a:buAutoNum type="arabicPeriod"/>
+              <a:buFont typeface="Arial" panose="020B0604020202020204" pitchFamily="34" charset="0"/>
+              <a:buChar char="•"/>
+              <a:defRPr sz="1250">
+                <a:solidFill>
+                  <a:srgbClr val="485563"/>
+                </a:solidFill>
+              </a:defRPr>
+            </a:pPr>
+            <a:r>
+              <a:rPr dirty="0"/>
+              <a:t>Defined churn as 30 days without a completed lesson and reactivation as a new completed lesson after a 30-day gap.</a:t>
+            </a:r>
+          </a:p>
+          <a:p>
+            <a:pPr marL="800100" lvl="1" indent="-342900">
+              <a:spcAft>
+                <a:spcPts val="700"/>
+              </a:spcAft>
+              <a:buFont typeface="Arial" panose="020B0604020202020204" pitchFamily="34" charset="0"/>
+              <a:buChar char="•"/>
               <a:defRPr sz="1250">
                 <a:solidFill>
                   <a:srgbClr val="485563"/>
@@ -3707,20 +4213,20 @@
       </p:sp>
       <p:sp>
         <p:nvSpPr>
-          <p:cNvPr id="14" name="Rounded Rectangle 13"/>
+          <p:cNvPr id="16" name="Rounded Rectangle 15"/>
           <p:cNvSpPr/>
           <p:nvPr/>
         </p:nvSpPr>
         <p:spPr>
           <a:xfrm>
-            <a:off x="6355080" y="3429000"/>
-            <a:ext cx="4983480" cy="1325880"/>
+            <a:off x="411480" y="5989320"/>
+            <a:ext cx="11338560" cy="502920"/>
           </a:xfrm>
           <a:prstGeom prst="roundRect">
             <a:avLst/>
           </a:prstGeom>
           <a:solidFill>
-            <a:srgbClr val="ECF2F7"/>
+            <a:srgbClr val="13264D"/>
           </a:solidFill>
           <a:ln>
             <a:noFill/>
@@ -3751,14 +4257,14 @@
       </p:sp>
       <p:sp>
         <p:nvSpPr>
-          <p:cNvPr id="15" name="TextBox 14"/>
+          <p:cNvPr id="17" name="TextBox 16"/>
           <p:cNvSpPr txBox="1"/>
           <p:nvPr/>
         </p:nvSpPr>
         <p:spPr>
           <a:xfrm>
-            <a:off x="6565392" y="3611880"/>
-            <a:ext cx="4572000" cy="914400"/>
+            <a:off x="640080" y="6108192"/>
+            <a:ext cx="8317726" cy="276999"/>
           </a:xfrm>
           <a:prstGeom prst="rect">
             <a:avLst/>
@@ -3766,48 +4272,82 @@
           <a:noFill/>
         </p:spPr>
         <p:txBody>
-          <a:bodyPr wrap="square">
+          <a:bodyPr wrap="none">
             <a:spAutoFit/>
           </a:bodyPr>
           <a:lstStyle/>
           <a:p>
             <a:pPr>
-              <a:defRPr sz="1300" b="1">
+              <a:defRPr sz="1200">
                 <a:solidFill>
-                  <a:srgbClr val="1C2536"/>
+                  <a:srgbClr val="FFFFFF"/>
                 </a:solidFill>
               </a:defRPr>
             </a:pPr>
             <a:r>
-              <a:t>Daily pattern</a:t>
-            </a:r>
-          </a:p>
-          <a:p>
-            <a:pPr>
-              <a:defRPr sz="1200">
-                <a:solidFill>
-                  <a:srgbClr val="485563"/>
-                </a:solidFill>
-              </a:defRPr>
-            </a:pPr>
-            <a:r>
-              <a:t>Churn averaged 133 events per day and peaked at 151 on 5 February. Reactivation averaged 105 per day and peaked at 122 on 12 February.</a:t>
-            </a:r>
-          </a:p>
-        </p:txBody>
-      </p:sp>
-      <p:sp>
-        <p:nvSpPr>
-          <p:cNvPr id="16" name="Rounded Rectangle 15"/>
+              <a:rPr lang="en-GB" dirty="0"/>
+              <a:t>R</a:t>
+            </a:r>
+            <a:r>
+              <a:rPr dirty="0"/>
+              <a:t>aw lesson data </a:t>
+            </a:r>
+            <a:r>
+              <a:rPr lang="en-GB" dirty="0"/>
+              <a:t>is turned into</a:t>
+            </a:r>
+            <a:r>
+              <a:rPr dirty="0"/>
+              <a:t> a repeatable student lifecycle view that the business can use to monitor retention risk and recovery.</a:t>
+            </a:r>
+          </a:p>
+        </p:txBody>
+      </p:sp>
+    </p:spTree>
+  </p:cSld>
+  <p:clrMapOvr>
+    <a:masterClrMapping/>
+  </p:clrMapOvr>
+</p:sld>
+</file>
+
+<file path=ppt/slides/slide2.xml><?xml version="1.0" encoding="utf-8"?>
+<p:sld xmlns:a="http://schemas.openxmlformats.org/drawingml/2006/main" xmlns:r="http://schemas.openxmlformats.org/officeDocument/2006/relationships" xmlns:p="http://schemas.openxmlformats.org/presentationml/2006/main">
+  <p:cSld>
+    <p:bg>
+      <p:bgPr>
+        <a:solidFill>
+          <a:srgbClr val="FAF7F2"/>
+        </a:solidFill>
+        <a:effectLst/>
+      </p:bgPr>
+    </p:bg>
+    <p:spTree>
+      <p:nvGrpSpPr>
+        <p:cNvPr id="1" name=""/>
+        <p:cNvGrpSpPr/>
+        <p:nvPr/>
+      </p:nvGrpSpPr>
+      <p:grpSpPr>
+        <a:xfrm>
+          <a:off x="0" y="0"/>
+          <a:ext cx="0" cy="0"/>
+          <a:chOff x="0" y="0"/>
+          <a:chExt cx="0" cy="0"/>
+        </a:xfrm>
+      </p:grpSpPr>
+      <p:sp>
+        <p:nvSpPr>
+          <p:cNvPr id="2" name="Rectangle 1"/>
           <p:cNvSpPr/>
           <p:nvPr/>
         </p:nvSpPr>
         <p:spPr>
           <a:xfrm>
-            <a:off x="411480" y="5989320"/>
-            <a:ext cx="11338560" cy="502920"/>
-          </a:xfrm>
-          <a:prstGeom prst="roundRect">
+            <a:off x="0" y="0"/>
+            <a:ext cx="12192000" cy="822960"/>
+          </a:xfrm>
+          <a:prstGeom prst="rect">
             <a:avLst/>
           </a:prstGeom>
           <a:solidFill>
@@ -3842,14 +4382,961 @@
       </p:sp>
       <p:sp>
         <p:nvSpPr>
-          <p:cNvPr id="17" name="TextBox 16"/>
+          <p:cNvPr id="3" name="TextBox 2"/>
           <p:cNvSpPr txBox="1"/>
           <p:nvPr/>
         </p:nvSpPr>
         <p:spPr>
           <a:xfrm>
-            <a:off x="640080" y="6108192"/>
-            <a:ext cx="10789920" cy="228600"/>
+            <a:off x="411480" y="164592"/>
+            <a:ext cx="8686800" cy="384048"/>
+          </a:xfrm>
+          <a:prstGeom prst="rect">
+            <a:avLst/>
+          </a:prstGeom>
+          <a:noFill/>
+        </p:spPr>
+        <p:txBody>
+          <a:bodyPr wrap="none">
+            <a:spAutoFit/>
+          </a:bodyPr>
+          <a:lstStyle/>
+          <a:p>
+            <a:pPr>
+              <a:defRPr sz="2400" b="1">
+                <a:solidFill>
+                  <a:srgbClr val="FFFFFF"/>
+                </a:solidFill>
+              </a:defRPr>
+            </a:pPr>
+            <a:r>
+              <a:t>Detailed Evidence Behind the February 2026 Findings</a:t>
+            </a:r>
+          </a:p>
+        </p:txBody>
+      </p:sp>
+      <p:sp>
+        <p:nvSpPr>
+          <p:cNvPr id="4" name="TextBox 3"/>
+          <p:cNvSpPr txBox="1"/>
+          <p:nvPr/>
+        </p:nvSpPr>
+        <p:spPr>
+          <a:xfrm>
+            <a:off x="429768" y="868680"/>
+            <a:ext cx="9875520" cy="320040"/>
+          </a:xfrm>
+          <a:prstGeom prst="rect">
+            <a:avLst/>
+          </a:prstGeom>
+          <a:noFill/>
+        </p:spPr>
+        <p:txBody>
+          <a:bodyPr wrap="none">
+            <a:spAutoFit/>
+          </a:bodyPr>
+          <a:lstStyle/>
+          <a:p>
+            <a:pPr>
+              <a:defRPr sz="1200">
+                <a:solidFill>
+                  <a:srgbClr val="485563"/>
+                </a:solidFill>
+              </a:defRPr>
+            </a:pPr>
+            <a:r>
+              <a:t>These observations now come from materialised curated tables, not one-off queries</a:t>
+            </a:r>
+          </a:p>
+        </p:txBody>
+      </p:sp>
+      <p:sp>
+        <p:nvSpPr>
+          <p:cNvPr id="5" name="Rounded Rectangle 4"/>
+          <p:cNvSpPr/>
+          <p:nvPr/>
+        </p:nvSpPr>
+        <p:spPr>
+          <a:xfrm>
+            <a:off x="502920" y="1325880"/>
+            <a:ext cx="2880360" cy="4480560"/>
+          </a:xfrm>
+          <a:prstGeom prst="roundRect">
+            <a:avLst/>
+          </a:prstGeom>
+          <a:solidFill>
+            <a:srgbClr val="FFFFFF"/>
+          </a:solidFill>
+          <a:ln>
+            <a:solidFill>
+              <a:srgbClr val="ECF2F7"/>
+            </a:solidFill>
+          </a:ln>
+        </p:spPr>
+        <p:style>
+          <a:lnRef idx="1">
+            <a:schemeClr val="accent1"/>
+          </a:lnRef>
+          <a:fillRef idx="3">
+            <a:schemeClr val="accent1"/>
+          </a:fillRef>
+          <a:effectRef idx="2">
+            <a:schemeClr val="accent1"/>
+          </a:effectRef>
+          <a:fontRef idx="minor">
+            <a:schemeClr val="lt1"/>
+          </a:fontRef>
+        </p:style>
+        <p:txBody>
+          <a:bodyPr rtlCol="0" anchor="ctr"/>
+          <a:lstStyle/>
+          <a:p>
+            <a:pPr algn="ctr"/>
+            <a:endParaRPr/>
+          </a:p>
+        </p:txBody>
+      </p:sp>
+      <p:sp>
+        <p:nvSpPr>
+          <p:cNvPr id="6" name="Rounded Rectangle 5"/>
+          <p:cNvSpPr/>
+          <p:nvPr/>
+        </p:nvSpPr>
+        <p:spPr>
+          <a:xfrm>
+            <a:off x="502920" y="1325880"/>
+            <a:ext cx="146304" cy="4480560"/>
+          </a:xfrm>
+          <a:prstGeom prst="roundRect">
+            <a:avLst/>
+          </a:prstGeom>
+          <a:solidFill>
+            <a:srgbClr val="E76F51"/>
+          </a:solidFill>
+          <a:ln>
+            <a:noFill/>
+          </a:ln>
+        </p:spPr>
+        <p:style>
+          <a:lnRef idx="1">
+            <a:schemeClr val="accent1"/>
+          </a:lnRef>
+          <a:fillRef idx="3">
+            <a:schemeClr val="accent1"/>
+          </a:fillRef>
+          <a:effectRef idx="2">
+            <a:schemeClr val="accent1"/>
+          </a:effectRef>
+          <a:fontRef idx="minor">
+            <a:schemeClr val="lt1"/>
+          </a:fontRef>
+        </p:style>
+        <p:txBody>
+          <a:bodyPr rtlCol="0" anchor="ctr"/>
+          <a:lstStyle/>
+          <a:p>
+            <a:pPr algn="ctr"/>
+            <a:endParaRPr/>
+          </a:p>
+        </p:txBody>
+      </p:sp>
+      <p:sp>
+        <p:nvSpPr>
+          <p:cNvPr id="7" name="TextBox 6"/>
+          <p:cNvSpPr txBox="1"/>
+          <p:nvPr/>
+        </p:nvSpPr>
+        <p:spPr>
+          <a:xfrm>
+            <a:off x="731520" y="1536192"/>
+            <a:ext cx="2514600" cy="4073423"/>
+          </a:xfrm>
+          <a:prstGeom prst="rect">
+            <a:avLst/>
+          </a:prstGeom>
+          <a:noFill/>
+        </p:spPr>
+        <p:txBody>
+          <a:bodyPr wrap="square">
+            <a:spAutoFit/>
+          </a:bodyPr>
+          <a:lstStyle/>
+          <a:p>
+            <a:pPr>
+              <a:defRPr sz="1700" b="1">
+                <a:solidFill>
+                  <a:srgbClr val="1C2536"/>
+                </a:solidFill>
+              </a:defRPr>
+            </a:pPr>
+            <a:r>
+              <a:rPr dirty="0"/>
+              <a:t>1. Subject evidence</a:t>
+            </a:r>
+            <a:br>
+              <a:rPr lang="en-GB" dirty="0"/>
+            </a:br>
+            <a:endParaRPr dirty="0"/>
+          </a:p>
+          <a:p>
+            <a:pPr>
+              <a:spcAft>
+                <a:spcPts val="400"/>
+              </a:spcAft>
+              <a:defRPr sz="1130">
+                <a:solidFill>
+                  <a:srgbClr val="485563"/>
+                </a:solidFill>
+              </a:defRPr>
+            </a:pPr>
+            <a:r>
+              <a:rPr dirty="0"/>
+              <a:t>Table: mart_lifecycle_by_subject_feb2026</a:t>
+            </a:r>
+            <a:br>
+              <a:rPr lang="en-GB" dirty="0"/>
+            </a:br>
+            <a:endParaRPr dirty="0"/>
+          </a:p>
+          <a:p>
+            <a:pPr>
+              <a:spcAft>
+                <a:spcPts val="400"/>
+              </a:spcAft>
+              <a:defRPr sz="1130">
+                <a:solidFill>
+                  <a:srgbClr val="485563"/>
+                </a:solidFill>
+              </a:defRPr>
+            </a:pPr>
+            <a:r>
+              <a:rPr dirty="0"/>
+              <a:t>Top churn rows: </a:t>
+            </a:r>
+            <a:br>
+              <a:rPr lang="en-GB" dirty="0"/>
+            </a:br>
+            <a:r>
+              <a:rPr dirty="0"/>
+              <a:t>GCSE </a:t>
+            </a:r>
+            <a:br>
+              <a:rPr lang="en-GB" dirty="0"/>
+            </a:br>
+            <a:r>
+              <a:rPr dirty="0" err="1"/>
+              <a:t>subject_id</a:t>
+            </a:r>
+            <a:r>
+              <a:rPr dirty="0"/>
+              <a:t> 6 = 403, </a:t>
+            </a:r>
+            <a:br>
+              <a:rPr lang="en-GB" dirty="0"/>
+            </a:br>
+            <a:r>
+              <a:rPr dirty="0" err="1"/>
+              <a:t>subject_id</a:t>
+            </a:r>
+            <a:r>
+              <a:rPr dirty="0"/>
+              <a:t> 27 = 312, </a:t>
+            </a:r>
+            <a:br>
+              <a:rPr lang="en-GB" dirty="0"/>
+            </a:br>
+            <a:r>
+              <a:rPr dirty="0" err="1"/>
+              <a:t>subject_id</a:t>
+            </a:r>
+            <a:r>
+              <a:rPr dirty="0"/>
+              <a:t> 51 = 186.</a:t>
+            </a:r>
+            <a:br>
+              <a:rPr lang="en-GB" dirty="0"/>
+            </a:br>
+            <a:endParaRPr dirty="0"/>
+          </a:p>
+          <a:p>
+            <a:pPr>
+              <a:spcAft>
+                <a:spcPts val="400"/>
+              </a:spcAft>
+              <a:defRPr sz="1130">
+                <a:solidFill>
+                  <a:srgbClr val="485563"/>
+                </a:solidFill>
+              </a:defRPr>
+            </a:pPr>
+            <a:r>
+              <a:rPr dirty="0"/>
+              <a:t>Top reactivation rows: </a:t>
+            </a:r>
+            <a:br>
+              <a:rPr lang="en-GB" dirty="0"/>
+            </a:br>
+            <a:r>
+              <a:rPr dirty="0"/>
+              <a:t>GCSE </a:t>
+            </a:r>
+            <a:br>
+              <a:rPr lang="en-GB" dirty="0"/>
+            </a:br>
+            <a:r>
+              <a:rPr dirty="0" err="1"/>
+              <a:t>subject_id</a:t>
+            </a:r>
+            <a:r>
+              <a:rPr dirty="0"/>
+              <a:t> 6 = 318, </a:t>
+            </a:r>
+            <a:br>
+              <a:rPr lang="en-GB" dirty="0"/>
+            </a:br>
+            <a:r>
+              <a:rPr dirty="0" err="1"/>
+              <a:t>subject_id</a:t>
+            </a:r>
+            <a:r>
+              <a:rPr dirty="0"/>
+              <a:t> 27 = 255.</a:t>
+            </a:r>
+            <a:br>
+              <a:rPr lang="en-GB" dirty="0"/>
+            </a:br>
+            <a:br>
+              <a:rPr lang="en-GB" dirty="0"/>
+            </a:br>
+            <a:endParaRPr dirty="0"/>
+          </a:p>
+          <a:p>
+            <a:pPr>
+              <a:spcAft>
+                <a:spcPts val="400"/>
+              </a:spcAft>
+              <a:defRPr sz="1130">
+                <a:solidFill>
+                  <a:srgbClr val="485563"/>
+                </a:solidFill>
+              </a:defRPr>
+            </a:pPr>
+            <a:r>
+              <a:rPr dirty="0"/>
+              <a:t>Suggestion: GCSE-related areas are repeatedly near the top, so subject-level retention review should start there.</a:t>
+            </a:r>
+          </a:p>
+        </p:txBody>
+      </p:sp>
+      <p:sp>
+        <p:nvSpPr>
+          <p:cNvPr id="8" name="Rounded Rectangle 7"/>
+          <p:cNvSpPr/>
+          <p:nvPr/>
+        </p:nvSpPr>
+        <p:spPr>
+          <a:xfrm>
+            <a:off x="3977639" y="1325880"/>
+            <a:ext cx="2880360" cy="4480560"/>
+          </a:xfrm>
+          <a:prstGeom prst="roundRect">
+            <a:avLst/>
+          </a:prstGeom>
+          <a:solidFill>
+            <a:srgbClr val="FFFFFF"/>
+          </a:solidFill>
+          <a:ln>
+            <a:solidFill>
+              <a:srgbClr val="ECF2F7"/>
+            </a:solidFill>
+          </a:ln>
+        </p:spPr>
+        <p:style>
+          <a:lnRef idx="1">
+            <a:schemeClr val="accent1"/>
+          </a:lnRef>
+          <a:fillRef idx="3">
+            <a:schemeClr val="accent1"/>
+          </a:fillRef>
+          <a:effectRef idx="2">
+            <a:schemeClr val="accent1"/>
+          </a:effectRef>
+          <a:fontRef idx="minor">
+            <a:schemeClr val="lt1"/>
+          </a:fontRef>
+        </p:style>
+        <p:txBody>
+          <a:bodyPr rtlCol="0" anchor="ctr"/>
+          <a:lstStyle/>
+          <a:p>
+            <a:pPr algn="ctr"/>
+            <a:endParaRPr/>
+          </a:p>
+        </p:txBody>
+      </p:sp>
+      <p:sp>
+        <p:nvSpPr>
+          <p:cNvPr id="9" name="Rounded Rectangle 8"/>
+          <p:cNvSpPr/>
+          <p:nvPr/>
+        </p:nvSpPr>
+        <p:spPr>
+          <a:xfrm>
+            <a:off x="3977639" y="1325880"/>
+            <a:ext cx="146304" cy="4480560"/>
+          </a:xfrm>
+          <a:prstGeom prst="roundRect">
+            <a:avLst/>
+          </a:prstGeom>
+          <a:solidFill>
+            <a:srgbClr val="1B998B"/>
+          </a:solidFill>
+          <a:ln>
+            <a:noFill/>
+          </a:ln>
+        </p:spPr>
+        <p:style>
+          <a:lnRef idx="1">
+            <a:schemeClr val="accent1"/>
+          </a:lnRef>
+          <a:fillRef idx="3">
+            <a:schemeClr val="accent1"/>
+          </a:fillRef>
+          <a:effectRef idx="2">
+            <a:schemeClr val="accent1"/>
+          </a:effectRef>
+          <a:fontRef idx="minor">
+            <a:schemeClr val="lt1"/>
+          </a:fontRef>
+        </p:style>
+        <p:txBody>
+          <a:bodyPr rtlCol="0" anchor="ctr"/>
+          <a:lstStyle/>
+          <a:p>
+            <a:pPr algn="ctr"/>
+            <a:endParaRPr/>
+          </a:p>
+        </p:txBody>
+      </p:sp>
+      <p:sp>
+        <p:nvSpPr>
+          <p:cNvPr id="10" name="TextBox 9"/>
+          <p:cNvSpPr txBox="1"/>
+          <p:nvPr/>
+        </p:nvSpPr>
+        <p:spPr>
+          <a:xfrm>
+            <a:off x="4206240" y="1536192"/>
+            <a:ext cx="2514600" cy="4073423"/>
+          </a:xfrm>
+          <a:prstGeom prst="rect">
+            <a:avLst/>
+          </a:prstGeom>
+          <a:noFill/>
+        </p:spPr>
+        <p:txBody>
+          <a:bodyPr wrap="square">
+            <a:spAutoFit/>
+          </a:bodyPr>
+          <a:lstStyle/>
+          <a:p>
+            <a:pPr>
+              <a:defRPr sz="1700" b="1">
+                <a:solidFill>
+                  <a:srgbClr val="1C2536"/>
+                </a:solidFill>
+              </a:defRPr>
+            </a:pPr>
+            <a:r>
+              <a:rPr dirty="0"/>
+              <a:t>2. Tutor evidence</a:t>
+            </a:r>
+            <a:br>
+              <a:rPr lang="en-GB" dirty="0"/>
+            </a:br>
+            <a:endParaRPr dirty="0"/>
+          </a:p>
+          <a:p>
+            <a:pPr>
+              <a:spcAft>
+                <a:spcPts val="400"/>
+              </a:spcAft>
+              <a:defRPr sz="1130">
+                <a:solidFill>
+                  <a:srgbClr val="485563"/>
+                </a:solidFill>
+              </a:defRPr>
+            </a:pPr>
+            <a:r>
+              <a:rPr dirty="0"/>
+              <a:t>Table: mart_lifecycle_by_tutor_feb2026</a:t>
+            </a:r>
+          </a:p>
+          <a:p>
+            <a:pPr>
+              <a:spcAft>
+                <a:spcPts val="400"/>
+              </a:spcAft>
+              <a:defRPr sz="1130">
+                <a:solidFill>
+                  <a:srgbClr val="485563"/>
+                </a:solidFill>
+              </a:defRPr>
+            </a:pPr>
+            <a:br>
+              <a:rPr lang="en-GB" dirty="0"/>
+            </a:br>
+            <a:r>
+              <a:rPr dirty="0"/>
+              <a:t>Top churn tutors: </a:t>
+            </a:r>
+            <a:br>
+              <a:rPr lang="en-GB" dirty="0"/>
+            </a:br>
+            <a:br>
+              <a:rPr lang="en-GB" dirty="0"/>
+            </a:br>
+            <a:r>
+              <a:rPr lang="en-GB" dirty="0" err="1"/>
+              <a:t>tutor_id</a:t>
+            </a:r>
+            <a:r>
+              <a:rPr lang="en-GB" dirty="0"/>
+              <a:t> </a:t>
+            </a:r>
+            <a:r>
+              <a:rPr dirty="0"/>
+              <a:t>28890 = 16, </a:t>
+            </a:r>
+            <a:br>
+              <a:rPr lang="en-GB" dirty="0"/>
+            </a:br>
+            <a:r>
+              <a:rPr lang="en-GB" dirty="0" err="1"/>
+              <a:t>tutor_id</a:t>
+            </a:r>
+            <a:r>
+              <a:rPr lang="en-GB" dirty="0"/>
+              <a:t> </a:t>
+            </a:r>
+            <a:r>
+              <a:rPr dirty="0"/>
+              <a:t>57973 = 15, </a:t>
+            </a:r>
+            <a:br>
+              <a:rPr lang="en-GB" dirty="0"/>
+            </a:br>
+            <a:r>
+              <a:rPr lang="en-GB" dirty="0" err="1"/>
+              <a:t>tutor_id</a:t>
+            </a:r>
+            <a:r>
+              <a:rPr lang="en-GB" dirty="0"/>
+              <a:t> </a:t>
+            </a:r>
+            <a:r>
+              <a:rPr dirty="0"/>
+              <a:t>381292 = 15.</a:t>
+            </a:r>
+            <a:br>
+              <a:rPr lang="en-GB" dirty="0"/>
+            </a:br>
+            <a:endParaRPr dirty="0"/>
+          </a:p>
+          <a:p>
+            <a:pPr>
+              <a:spcAft>
+                <a:spcPts val="400"/>
+              </a:spcAft>
+              <a:defRPr sz="1130">
+                <a:solidFill>
+                  <a:srgbClr val="485563"/>
+                </a:solidFill>
+              </a:defRPr>
+            </a:pPr>
+            <a:r>
+              <a:rPr dirty="0"/>
+              <a:t>Top reactivation tutors: </a:t>
+            </a:r>
+            <a:br>
+              <a:rPr lang="en-GB" dirty="0"/>
+            </a:br>
+            <a:r>
+              <a:rPr lang="en-GB" dirty="0" err="1"/>
+              <a:t>tutor_id</a:t>
+            </a:r>
+            <a:r>
+              <a:rPr lang="en-GB" dirty="0"/>
+              <a:t> </a:t>
+            </a:r>
+            <a:r>
+              <a:rPr dirty="0"/>
+              <a:t>627047 = 19, </a:t>
+            </a:r>
+            <a:br>
+              <a:rPr lang="en-GB" dirty="0"/>
+            </a:br>
+            <a:r>
+              <a:rPr lang="en-GB" dirty="0" err="1"/>
+              <a:t>tutor_id</a:t>
+            </a:r>
+            <a:r>
+              <a:rPr lang="en-GB" dirty="0"/>
+              <a:t> </a:t>
+            </a:r>
+            <a:r>
+              <a:rPr dirty="0"/>
+              <a:t>57973 = 15.</a:t>
+            </a:r>
+            <a:br>
+              <a:rPr lang="en-GB" dirty="0"/>
+            </a:br>
+            <a:endParaRPr dirty="0"/>
+          </a:p>
+          <a:p>
+            <a:pPr>
+              <a:spcAft>
+                <a:spcPts val="400"/>
+              </a:spcAft>
+              <a:defRPr sz="1130">
+                <a:solidFill>
+                  <a:srgbClr val="485563"/>
+                </a:solidFill>
+              </a:defRPr>
+            </a:pPr>
+            <a:br>
+              <a:rPr lang="en-GB" dirty="0"/>
+            </a:br>
+            <a:br>
+              <a:rPr lang="en-GB" dirty="0"/>
+            </a:br>
+            <a:r>
+              <a:rPr dirty="0"/>
+              <a:t>Suggestion: tutor effects look more dispersed, so tutor reporting is better for spotting outliers than explaining total volume.</a:t>
+            </a:r>
+          </a:p>
+        </p:txBody>
+      </p:sp>
+      <p:sp>
+        <p:nvSpPr>
+          <p:cNvPr id="11" name="Rounded Rectangle 10"/>
+          <p:cNvSpPr/>
+          <p:nvPr/>
+        </p:nvSpPr>
+        <p:spPr>
+          <a:xfrm>
+            <a:off x="7452360" y="1325880"/>
+            <a:ext cx="2880360" cy="4480560"/>
+          </a:xfrm>
+          <a:prstGeom prst="roundRect">
+            <a:avLst/>
+          </a:prstGeom>
+          <a:solidFill>
+            <a:srgbClr val="FFFFFF"/>
+          </a:solidFill>
+          <a:ln>
+            <a:solidFill>
+              <a:srgbClr val="ECF2F7"/>
+            </a:solidFill>
+          </a:ln>
+        </p:spPr>
+        <p:style>
+          <a:lnRef idx="1">
+            <a:schemeClr val="accent1"/>
+          </a:lnRef>
+          <a:fillRef idx="3">
+            <a:schemeClr val="accent1"/>
+          </a:fillRef>
+          <a:effectRef idx="2">
+            <a:schemeClr val="accent1"/>
+          </a:effectRef>
+          <a:fontRef idx="minor">
+            <a:schemeClr val="lt1"/>
+          </a:fontRef>
+        </p:style>
+        <p:txBody>
+          <a:bodyPr rtlCol="0" anchor="ctr"/>
+          <a:lstStyle/>
+          <a:p>
+            <a:pPr algn="ctr"/>
+            <a:endParaRPr/>
+          </a:p>
+        </p:txBody>
+      </p:sp>
+      <p:sp>
+        <p:nvSpPr>
+          <p:cNvPr id="12" name="Rounded Rectangle 11"/>
+          <p:cNvSpPr/>
+          <p:nvPr/>
+        </p:nvSpPr>
+        <p:spPr>
+          <a:xfrm>
+            <a:off x="7452360" y="1325880"/>
+            <a:ext cx="146304" cy="4480560"/>
+          </a:xfrm>
+          <a:prstGeom prst="roundRect">
+            <a:avLst/>
+          </a:prstGeom>
+          <a:solidFill>
+            <a:srgbClr val="13264D"/>
+          </a:solidFill>
+          <a:ln>
+            <a:noFill/>
+          </a:ln>
+        </p:spPr>
+        <p:style>
+          <a:lnRef idx="1">
+            <a:schemeClr val="accent1"/>
+          </a:lnRef>
+          <a:fillRef idx="3">
+            <a:schemeClr val="accent1"/>
+          </a:fillRef>
+          <a:effectRef idx="2">
+            <a:schemeClr val="accent1"/>
+          </a:effectRef>
+          <a:fontRef idx="minor">
+            <a:schemeClr val="lt1"/>
+          </a:fontRef>
+        </p:style>
+        <p:txBody>
+          <a:bodyPr rtlCol="0" anchor="ctr"/>
+          <a:lstStyle/>
+          <a:p>
+            <a:pPr algn="ctr"/>
+            <a:endParaRPr/>
+          </a:p>
+        </p:txBody>
+      </p:sp>
+      <p:sp>
+        <p:nvSpPr>
+          <p:cNvPr id="13" name="TextBox 12"/>
+          <p:cNvSpPr txBox="1"/>
+          <p:nvPr/>
+        </p:nvSpPr>
+        <p:spPr>
+          <a:xfrm>
+            <a:off x="7680960" y="1536192"/>
+            <a:ext cx="2514600" cy="4073423"/>
+          </a:xfrm>
+          <a:prstGeom prst="rect">
+            <a:avLst/>
+          </a:prstGeom>
+          <a:noFill/>
+        </p:spPr>
+        <p:txBody>
+          <a:bodyPr wrap="square">
+            <a:spAutoFit/>
+          </a:bodyPr>
+          <a:lstStyle/>
+          <a:p>
+            <a:pPr>
+              <a:defRPr sz="1700" b="1">
+                <a:solidFill>
+                  <a:srgbClr val="1C2536"/>
+                </a:solidFill>
+              </a:defRPr>
+            </a:pPr>
+            <a:r>
+              <a:rPr dirty="0"/>
+              <a:t>3. Tenure evidence</a:t>
+            </a:r>
+            <a:br>
+              <a:rPr lang="en-GB" dirty="0"/>
+            </a:br>
+            <a:endParaRPr dirty="0"/>
+          </a:p>
+          <a:p>
+            <a:pPr>
+              <a:spcAft>
+                <a:spcPts val="400"/>
+              </a:spcAft>
+              <a:defRPr sz="1130">
+                <a:solidFill>
+                  <a:srgbClr val="485563"/>
+                </a:solidFill>
+              </a:defRPr>
+            </a:pPr>
+            <a:r>
+              <a:rPr dirty="0"/>
+              <a:t>Table: mart_lifecycle_by_tenure_feb2026</a:t>
+            </a:r>
+          </a:p>
+          <a:p>
+            <a:pPr>
+              <a:spcAft>
+                <a:spcPts val="400"/>
+              </a:spcAft>
+              <a:defRPr sz="1130">
+                <a:solidFill>
+                  <a:srgbClr val="485563"/>
+                </a:solidFill>
+              </a:defRPr>
+            </a:pPr>
+            <a:br>
+              <a:rPr lang="en-GB" dirty="0"/>
+            </a:br>
+            <a:r>
+              <a:rPr dirty="0"/>
+              <a:t>Established </a:t>
+            </a:r>
+            <a:r>
+              <a:rPr lang="en-GB" dirty="0"/>
+              <a:t>Tutors </a:t>
+            </a:r>
+            <a:r>
+              <a:rPr dirty="0"/>
+              <a:t>churn = 2,960 </a:t>
+            </a:r>
+            <a:br>
+              <a:rPr lang="en-GB" dirty="0"/>
+            </a:br>
+            <a:r>
+              <a:rPr lang="en-GB" dirty="0"/>
+              <a:t>New Tutors</a:t>
+            </a:r>
+            <a:r>
+              <a:rPr dirty="0"/>
+              <a:t> churn = 769.</a:t>
+            </a:r>
+            <a:br>
+              <a:rPr lang="en-GB" dirty="0"/>
+            </a:br>
+            <a:endParaRPr dirty="0"/>
+          </a:p>
+          <a:p>
+            <a:pPr>
+              <a:spcAft>
+                <a:spcPts val="400"/>
+              </a:spcAft>
+              <a:defRPr sz="1130">
+                <a:solidFill>
+                  <a:srgbClr val="485563"/>
+                </a:solidFill>
+              </a:defRPr>
+            </a:pPr>
+            <a:r>
+              <a:rPr dirty="0"/>
+              <a:t>Established </a:t>
+            </a:r>
+            <a:r>
+              <a:rPr lang="en-GB" dirty="0"/>
+              <a:t>Tutors </a:t>
+            </a:r>
+            <a:r>
+              <a:rPr dirty="0"/>
+              <a:t>reactivation = 2,606 </a:t>
+            </a:r>
+            <a:r>
+              <a:rPr lang="en-GB" dirty="0"/>
+              <a:t>N</a:t>
+            </a:r>
+            <a:r>
+              <a:rPr dirty="0" err="1"/>
+              <a:t>ew</a:t>
+            </a:r>
+            <a:r>
+              <a:rPr lang="en-GB" dirty="0"/>
+              <a:t> Tutors</a:t>
+            </a:r>
+            <a:r>
+              <a:rPr dirty="0"/>
+              <a:t> reactivation = 336.</a:t>
+            </a:r>
+            <a:br>
+              <a:rPr lang="en-GB" dirty="0"/>
+            </a:br>
+            <a:br>
+              <a:rPr lang="en-GB" dirty="0"/>
+            </a:br>
+            <a:br>
+              <a:rPr lang="en-GB" dirty="0"/>
+            </a:br>
+            <a:br>
+              <a:rPr lang="en-GB" dirty="0"/>
+            </a:br>
+            <a:br>
+              <a:rPr lang="en-GB" dirty="0"/>
+            </a:br>
+            <a:br>
+              <a:rPr lang="en-GB" dirty="0"/>
+            </a:br>
+            <a:br>
+              <a:rPr lang="en-GB" dirty="0"/>
+            </a:br>
+            <a:endParaRPr dirty="0"/>
+          </a:p>
+          <a:p>
+            <a:pPr>
+              <a:spcAft>
+                <a:spcPts val="400"/>
+              </a:spcAft>
+              <a:defRPr sz="1130">
+                <a:solidFill>
+                  <a:srgbClr val="485563"/>
+                </a:solidFill>
+              </a:defRPr>
+            </a:pPr>
+            <a:r>
+              <a:rPr dirty="0"/>
+              <a:t>Suggestion: most lifecycle volume sits with established students, so the biggest retention opportunity is protecting the existing base.</a:t>
+            </a:r>
+          </a:p>
+        </p:txBody>
+      </p:sp>
+      <p:sp>
+        <p:nvSpPr>
+          <p:cNvPr id="14" name="Rounded Rectangle 13"/>
+          <p:cNvSpPr/>
+          <p:nvPr/>
+        </p:nvSpPr>
+        <p:spPr>
+          <a:xfrm>
+            <a:off x="502920" y="5925312"/>
+            <a:ext cx="11201400" cy="502920"/>
+          </a:xfrm>
+          <a:prstGeom prst="roundRect">
+            <a:avLst/>
+          </a:prstGeom>
+          <a:solidFill>
+            <a:srgbClr val="13264D"/>
+          </a:solidFill>
+          <a:ln>
+            <a:noFill/>
+          </a:ln>
+        </p:spPr>
+        <p:style>
+          <a:lnRef idx="1">
+            <a:schemeClr val="accent1"/>
+          </a:lnRef>
+          <a:fillRef idx="3">
+            <a:schemeClr val="accent1"/>
+          </a:fillRef>
+          <a:effectRef idx="2">
+            <a:schemeClr val="accent1"/>
+          </a:effectRef>
+          <a:fontRef idx="minor">
+            <a:schemeClr val="lt1"/>
+          </a:fontRef>
+        </p:style>
+        <p:txBody>
+          <a:bodyPr rtlCol="0" anchor="ctr"/>
+          <a:lstStyle/>
+          <a:p>
+            <a:pPr algn="ctr"/>
+            <a:endParaRPr/>
+          </a:p>
+        </p:txBody>
+      </p:sp>
+      <p:sp>
+        <p:nvSpPr>
+          <p:cNvPr id="15" name="TextBox 14"/>
+          <p:cNvSpPr txBox="1"/>
+          <p:nvPr/>
+        </p:nvSpPr>
+        <p:spPr>
+          <a:xfrm>
+            <a:off x="713232" y="6044184"/>
+            <a:ext cx="6892336" cy="276999"/>
           </a:xfrm>
           <a:prstGeom prst="rect">
             <a:avLst/>
@@ -3870,21 +5357,103 @@
               </a:defRPr>
             </a:pPr>
             <a:r>
-              <a:t>Why it matters: the pipeline turns raw lesson data into a repeatable student lifecycle view that the business can use to monitor retention risk and recovery day by day.</a:t>
-            </a:r>
-          </a:p>
-        </p:txBody>
-      </p:sp>
-      <p:sp>
-        <p:nvSpPr>
-          <p:cNvPr id="18" name="TextBox 17"/>
+              <a:rPr lang="en-GB" dirty="0"/>
+              <a:t>E</a:t>
+            </a:r>
+            <a:r>
+              <a:rPr dirty="0"/>
+              <a:t>stablished-student retention and high-volume subject areas as the highest-impact places to intervene first.</a:t>
+            </a:r>
+          </a:p>
+        </p:txBody>
+      </p:sp>
+    </p:spTree>
+  </p:cSld>
+  <p:clrMapOvr>
+    <a:masterClrMapping/>
+  </p:clrMapOvr>
+</p:sld>
+</file>
+
+<file path=ppt/slides/slide3.xml><?xml version="1.0" encoding="utf-8"?>
+<p:sld xmlns:a="http://schemas.openxmlformats.org/drawingml/2006/main" xmlns:r="http://schemas.openxmlformats.org/officeDocument/2006/relationships" xmlns:p="http://schemas.openxmlformats.org/presentationml/2006/main">
+  <p:cSld>
+    <p:bg>
+      <p:bgPr>
+        <a:solidFill>
+          <a:srgbClr val="FAF7F2"/>
+        </a:solidFill>
+        <a:effectLst/>
+      </p:bgPr>
+    </p:bg>
+    <p:spTree>
+      <p:nvGrpSpPr>
+        <p:cNvPr id="1" name=""/>
+        <p:cNvGrpSpPr/>
+        <p:nvPr/>
+      </p:nvGrpSpPr>
+      <p:grpSpPr>
+        <a:xfrm>
+          <a:off x="0" y="0"/>
+          <a:ext cx="0" cy="0"/>
+          <a:chOff x="0" y="0"/>
+          <a:chExt cx="0" cy="0"/>
+        </a:xfrm>
+      </p:grpSpPr>
+      <p:sp>
+        <p:nvSpPr>
+          <p:cNvPr id="2" name="Rectangle 1"/>
+          <p:cNvSpPr/>
+          <p:nvPr/>
+        </p:nvSpPr>
+        <p:spPr>
+          <a:xfrm>
+            <a:off x="0" y="0"/>
+            <a:ext cx="12192000" cy="822960"/>
+          </a:xfrm>
+          <a:prstGeom prst="rect">
+            <a:avLst/>
+          </a:prstGeom>
+          <a:solidFill>
+            <a:srgbClr val="13264D"/>
+          </a:solidFill>
+          <a:ln>
+            <a:noFill/>
+          </a:ln>
+        </p:spPr>
+        <p:style>
+          <a:lnRef idx="1">
+            <a:schemeClr val="accent1"/>
+          </a:lnRef>
+          <a:fillRef idx="3">
+            <a:schemeClr val="accent1"/>
+          </a:fillRef>
+          <a:effectRef idx="2">
+            <a:schemeClr val="accent1"/>
+          </a:effectRef>
+          <a:fontRef idx="minor">
+            <a:schemeClr val="lt1"/>
+          </a:fontRef>
+        </p:style>
+        <p:txBody>
+          <a:bodyPr rtlCol="0" anchor="ctr"/>
+          <a:lstStyle/>
+          <a:p>
+            <a:pPr algn="ctr"/>
+            <a:endParaRPr/>
+          </a:p>
+        </p:txBody>
+      </p:sp>
+      <p:sp>
+        <p:nvSpPr>
+          <p:cNvPr id="3" name="TextBox 2"/>
           <p:cNvSpPr txBox="1"/>
           <p:nvPr/>
         </p:nvSpPr>
         <p:spPr>
           <a:xfrm>
-            <a:off x="9966960" y="182880"/>
-            <a:ext cx="1737360" cy="182880"/>
+            <a:off x="411480" y="164592"/>
+            <a:ext cx="8046720" cy="411480"/>
           </a:xfrm>
           <a:prstGeom prst="rect">
             <a:avLst/>
@@ -3897,15 +5466,586 @@
           </a:bodyPr>
           <a:lstStyle/>
           <a:p>
-            <a:pPr algn="r">
-              <a:defRPr sz="1000">
+            <a:pPr>
+              <a:defRPr sz="2400" b="1">
                 <a:solidFill>
-                  <a:srgbClr val="D2DCEB"/>
+                  <a:srgbClr val="FFFFFF"/>
                 </a:solidFill>
               </a:defRPr>
             </a:pPr>
             <a:r>
-              <a:t>Prepared in dbt</a:t>
+              <a:t>Additional Retention Analysis: Where to Focus</a:t>
+            </a:r>
+          </a:p>
+        </p:txBody>
+      </p:sp>
+      <p:sp>
+        <p:nvSpPr>
+          <p:cNvPr id="4" name="TextBox 3"/>
+          <p:cNvSpPr txBox="1"/>
+          <p:nvPr/>
+        </p:nvSpPr>
+        <p:spPr>
+          <a:xfrm>
+            <a:off x="429768" y="868680"/>
+            <a:ext cx="8046720" cy="365760"/>
+          </a:xfrm>
+          <a:prstGeom prst="rect">
+            <a:avLst/>
+          </a:prstGeom>
+          <a:noFill/>
+        </p:spPr>
+        <p:txBody>
+          <a:bodyPr wrap="none">
+            <a:spAutoFit/>
+          </a:bodyPr>
+          <a:lstStyle/>
+          <a:p>
+            <a:pPr>
+              <a:defRPr sz="1200">
+                <a:solidFill>
+                  <a:srgbClr val="485563"/>
+                </a:solidFill>
+              </a:defRPr>
+            </a:pPr>
+            <a:r>
+              <a:t>New curated marts cut lifecycle events by subject, tutor, and student tenure</a:t>
+            </a:r>
+          </a:p>
+        </p:txBody>
+      </p:sp>
+      <p:sp>
+        <p:nvSpPr>
+          <p:cNvPr id="5" name="Rounded Rectangle 4"/>
+          <p:cNvSpPr/>
+          <p:nvPr/>
+        </p:nvSpPr>
+        <p:spPr>
+          <a:xfrm>
+            <a:off x="502920" y="1325880"/>
+            <a:ext cx="3383280" cy="1691640"/>
+          </a:xfrm>
+          <a:prstGeom prst="roundRect">
+            <a:avLst/>
+          </a:prstGeom>
+          <a:solidFill>
+            <a:srgbClr val="FFFFFF"/>
+          </a:solidFill>
+          <a:ln>
+            <a:solidFill>
+              <a:srgbClr val="ECF2F7"/>
+            </a:solidFill>
+          </a:ln>
+        </p:spPr>
+        <p:style>
+          <a:lnRef idx="1">
+            <a:schemeClr val="accent1"/>
+          </a:lnRef>
+          <a:fillRef idx="3">
+            <a:schemeClr val="accent1"/>
+          </a:fillRef>
+          <a:effectRef idx="2">
+            <a:schemeClr val="accent1"/>
+          </a:effectRef>
+          <a:fontRef idx="minor">
+            <a:schemeClr val="lt1"/>
+          </a:fontRef>
+        </p:style>
+        <p:txBody>
+          <a:bodyPr rtlCol="0" anchor="ctr"/>
+          <a:lstStyle/>
+          <a:p>
+            <a:pPr algn="ctr"/>
+            <a:endParaRPr/>
+          </a:p>
+        </p:txBody>
+      </p:sp>
+      <p:sp>
+        <p:nvSpPr>
+          <p:cNvPr id="6" name="Rounded Rectangle 5"/>
+          <p:cNvSpPr/>
+          <p:nvPr/>
+        </p:nvSpPr>
+        <p:spPr>
+          <a:xfrm>
+            <a:off x="502920" y="1325880"/>
+            <a:ext cx="164592" cy="1691640"/>
+          </a:xfrm>
+          <a:prstGeom prst="roundRect">
+            <a:avLst/>
+          </a:prstGeom>
+          <a:solidFill>
+            <a:srgbClr val="E76F51"/>
+          </a:solidFill>
+          <a:ln>
+            <a:noFill/>
+          </a:ln>
+        </p:spPr>
+        <p:style>
+          <a:lnRef idx="1">
+            <a:schemeClr val="accent1"/>
+          </a:lnRef>
+          <a:fillRef idx="3">
+            <a:schemeClr val="accent1"/>
+          </a:fillRef>
+          <a:effectRef idx="2">
+            <a:schemeClr val="accent1"/>
+          </a:effectRef>
+          <a:fontRef idx="minor">
+            <a:schemeClr val="lt1"/>
+          </a:fontRef>
+        </p:style>
+        <p:txBody>
+          <a:bodyPr rtlCol="0" anchor="ctr"/>
+          <a:lstStyle/>
+          <a:p>
+            <a:pPr algn="ctr"/>
+            <a:endParaRPr/>
+          </a:p>
+        </p:txBody>
+      </p:sp>
+      <p:sp>
+        <p:nvSpPr>
+          <p:cNvPr id="7" name="TextBox 6"/>
+          <p:cNvSpPr txBox="1"/>
+          <p:nvPr/>
+        </p:nvSpPr>
+        <p:spPr>
+          <a:xfrm>
+            <a:off x="758952" y="1508760"/>
+            <a:ext cx="2834640" cy="1234440"/>
+          </a:xfrm>
+          <a:prstGeom prst="rect">
+            <a:avLst/>
+          </a:prstGeom>
+          <a:noFill/>
+        </p:spPr>
+        <p:txBody>
+          <a:bodyPr wrap="square">
+            <a:spAutoFit/>
+          </a:bodyPr>
+          <a:lstStyle/>
+          <a:p>
+            <a:pPr>
+              <a:defRPr sz="1600" b="1">
+                <a:solidFill>
+                  <a:srgbClr val="1C2536"/>
+                </a:solidFill>
+              </a:defRPr>
+            </a:pPr>
+            <a:r>
+              <a:t>Subject view</a:t>
+            </a:r>
+          </a:p>
+          <a:p>
+            <a:pPr>
+              <a:defRPr sz="1150">
+                <a:solidFill>
+                  <a:srgbClr val="485563"/>
+                </a:solidFill>
+              </a:defRPr>
+            </a:pPr>
+            <a:r>
+              <a:t>GCSE-related subjects drove the highest churn and reactivation volumes in February 2026.</a:t>
+            </a:r>
+          </a:p>
+        </p:txBody>
+      </p:sp>
+      <p:sp>
+        <p:nvSpPr>
+          <p:cNvPr id="8" name="Rounded Rectangle 7"/>
+          <p:cNvSpPr/>
+          <p:nvPr/>
+        </p:nvSpPr>
+        <p:spPr>
+          <a:xfrm>
+            <a:off x="4114800" y="1325880"/>
+            <a:ext cx="3383280" cy="1691640"/>
+          </a:xfrm>
+          <a:prstGeom prst="roundRect">
+            <a:avLst/>
+          </a:prstGeom>
+          <a:solidFill>
+            <a:srgbClr val="FFFFFF"/>
+          </a:solidFill>
+          <a:ln>
+            <a:solidFill>
+              <a:srgbClr val="ECF2F7"/>
+            </a:solidFill>
+          </a:ln>
+        </p:spPr>
+        <p:style>
+          <a:lnRef idx="1">
+            <a:schemeClr val="accent1"/>
+          </a:lnRef>
+          <a:fillRef idx="3">
+            <a:schemeClr val="accent1"/>
+          </a:fillRef>
+          <a:effectRef idx="2">
+            <a:schemeClr val="accent1"/>
+          </a:effectRef>
+          <a:fontRef idx="minor">
+            <a:schemeClr val="lt1"/>
+          </a:fontRef>
+        </p:style>
+        <p:txBody>
+          <a:bodyPr rtlCol="0" anchor="ctr"/>
+          <a:lstStyle/>
+          <a:p>
+            <a:pPr algn="ctr"/>
+            <a:endParaRPr/>
+          </a:p>
+        </p:txBody>
+      </p:sp>
+      <p:sp>
+        <p:nvSpPr>
+          <p:cNvPr id="9" name="Rounded Rectangle 8"/>
+          <p:cNvSpPr/>
+          <p:nvPr/>
+        </p:nvSpPr>
+        <p:spPr>
+          <a:xfrm>
+            <a:off x="4114800" y="1325880"/>
+            <a:ext cx="164592" cy="1691640"/>
+          </a:xfrm>
+          <a:prstGeom prst="roundRect">
+            <a:avLst/>
+          </a:prstGeom>
+          <a:solidFill>
+            <a:srgbClr val="1B998B"/>
+          </a:solidFill>
+          <a:ln>
+            <a:noFill/>
+          </a:ln>
+        </p:spPr>
+        <p:style>
+          <a:lnRef idx="1">
+            <a:schemeClr val="accent1"/>
+          </a:lnRef>
+          <a:fillRef idx="3">
+            <a:schemeClr val="accent1"/>
+          </a:fillRef>
+          <a:effectRef idx="2">
+            <a:schemeClr val="accent1"/>
+          </a:effectRef>
+          <a:fontRef idx="minor">
+            <a:schemeClr val="lt1"/>
+          </a:fontRef>
+        </p:style>
+        <p:txBody>
+          <a:bodyPr rtlCol="0" anchor="ctr"/>
+          <a:lstStyle/>
+          <a:p>
+            <a:pPr algn="ctr"/>
+            <a:endParaRPr/>
+          </a:p>
+        </p:txBody>
+      </p:sp>
+      <p:sp>
+        <p:nvSpPr>
+          <p:cNvPr id="10" name="TextBox 9"/>
+          <p:cNvSpPr txBox="1"/>
+          <p:nvPr/>
+        </p:nvSpPr>
+        <p:spPr>
+          <a:xfrm>
+            <a:off x="4370832" y="1508760"/>
+            <a:ext cx="2834640" cy="1234440"/>
+          </a:xfrm>
+          <a:prstGeom prst="rect">
+            <a:avLst/>
+          </a:prstGeom>
+          <a:noFill/>
+        </p:spPr>
+        <p:txBody>
+          <a:bodyPr wrap="square">
+            <a:spAutoFit/>
+          </a:bodyPr>
+          <a:lstStyle/>
+          <a:p>
+            <a:pPr>
+              <a:defRPr sz="1600" b="1">
+                <a:solidFill>
+                  <a:srgbClr val="1C2536"/>
+                </a:solidFill>
+              </a:defRPr>
+            </a:pPr>
+            <a:r>
+              <a:t>Tutor view</a:t>
+            </a:r>
+          </a:p>
+          <a:p>
+            <a:pPr>
+              <a:defRPr sz="1150">
+                <a:solidFill>
+                  <a:srgbClr val="485563"/>
+                </a:solidFill>
+              </a:defRPr>
+            </a:pPr>
+            <a:r>
+              <a:t>Tutor events were more dispersed: the top tutor drove 16 churn events and the top reactivation tutor drove 19.</a:t>
+            </a:r>
+          </a:p>
+        </p:txBody>
+      </p:sp>
+      <p:sp>
+        <p:nvSpPr>
+          <p:cNvPr id="11" name="Rounded Rectangle 10"/>
+          <p:cNvSpPr/>
+          <p:nvPr/>
+        </p:nvSpPr>
+        <p:spPr>
+          <a:xfrm>
+            <a:off x="7726679" y="1325880"/>
+            <a:ext cx="3383280" cy="1691640"/>
+          </a:xfrm>
+          <a:prstGeom prst="roundRect">
+            <a:avLst/>
+          </a:prstGeom>
+          <a:solidFill>
+            <a:srgbClr val="FFFFFF"/>
+          </a:solidFill>
+          <a:ln>
+            <a:solidFill>
+              <a:srgbClr val="ECF2F7"/>
+            </a:solidFill>
+          </a:ln>
+        </p:spPr>
+        <p:style>
+          <a:lnRef idx="1">
+            <a:schemeClr val="accent1"/>
+          </a:lnRef>
+          <a:fillRef idx="3">
+            <a:schemeClr val="accent1"/>
+          </a:fillRef>
+          <a:effectRef idx="2">
+            <a:schemeClr val="accent1"/>
+          </a:effectRef>
+          <a:fontRef idx="minor">
+            <a:schemeClr val="lt1"/>
+          </a:fontRef>
+        </p:style>
+        <p:txBody>
+          <a:bodyPr rtlCol="0" anchor="ctr"/>
+          <a:lstStyle/>
+          <a:p>
+            <a:pPr algn="ctr"/>
+            <a:endParaRPr/>
+          </a:p>
+        </p:txBody>
+      </p:sp>
+      <p:sp>
+        <p:nvSpPr>
+          <p:cNvPr id="12" name="Rounded Rectangle 11"/>
+          <p:cNvSpPr/>
+          <p:nvPr/>
+        </p:nvSpPr>
+        <p:spPr>
+          <a:xfrm>
+            <a:off x="7726679" y="1325880"/>
+            <a:ext cx="164592" cy="1691640"/>
+          </a:xfrm>
+          <a:prstGeom prst="roundRect">
+            <a:avLst/>
+          </a:prstGeom>
+          <a:solidFill>
+            <a:srgbClr val="13264D"/>
+          </a:solidFill>
+          <a:ln>
+            <a:noFill/>
+          </a:ln>
+        </p:spPr>
+        <p:style>
+          <a:lnRef idx="1">
+            <a:schemeClr val="accent1"/>
+          </a:lnRef>
+          <a:fillRef idx="3">
+            <a:schemeClr val="accent1"/>
+          </a:fillRef>
+          <a:effectRef idx="2">
+            <a:schemeClr val="accent1"/>
+          </a:effectRef>
+          <a:fontRef idx="minor">
+            <a:schemeClr val="lt1"/>
+          </a:fontRef>
+        </p:style>
+        <p:txBody>
+          <a:bodyPr rtlCol="0" anchor="ctr"/>
+          <a:lstStyle/>
+          <a:p>
+            <a:pPr algn="ctr"/>
+            <a:endParaRPr/>
+          </a:p>
+        </p:txBody>
+      </p:sp>
+      <p:sp>
+        <p:nvSpPr>
+          <p:cNvPr id="13" name="TextBox 12"/>
+          <p:cNvSpPr txBox="1"/>
+          <p:nvPr/>
+        </p:nvSpPr>
+        <p:spPr>
+          <a:xfrm>
+            <a:off x="7982711" y="1508760"/>
+            <a:ext cx="2834640" cy="1234440"/>
+          </a:xfrm>
+          <a:prstGeom prst="rect">
+            <a:avLst/>
+          </a:prstGeom>
+          <a:noFill/>
+        </p:spPr>
+        <p:txBody>
+          <a:bodyPr wrap="square">
+            <a:spAutoFit/>
+          </a:bodyPr>
+          <a:lstStyle/>
+          <a:p>
+            <a:pPr>
+              <a:defRPr sz="1600" b="1">
+                <a:solidFill>
+                  <a:srgbClr val="1C2536"/>
+                </a:solidFill>
+              </a:defRPr>
+            </a:pPr>
+            <a:r>
+              <a:t>Tenure view</a:t>
+            </a:r>
+          </a:p>
+          <a:p>
+            <a:pPr>
+              <a:defRPr sz="1150">
+                <a:solidFill>
+                  <a:srgbClr val="485563"/>
+                </a:solidFill>
+              </a:defRPr>
+            </a:pPr>
+            <a:r>
+              <a:t>Established students drove most lifecycle events, showing retention action should prioritise the existing base.</a:t>
+            </a:r>
+          </a:p>
+        </p:txBody>
+      </p:sp>
+      <p:sp>
+        <p:nvSpPr>
+          <p:cNvPr id="18" name="Rounded Rectangle 17"/>
+          <p:cNvSpPr/>
+          <p:nvPr/>
+        </p:nvSpPr>
+        <p:spPr>
+          <a:xfrm>
+            <a:off x="502920" y="3337560"/>
+            <a:ext cx="11247120" cy="2148840"/>
+          </a:xfrm>
+          <a:prstGeom prst="roundRect">
+            <a:avLst/>
+          </a:prstGeom>
+          <a:solidFill>
+            <a:srgbClr val="FFFFFF"/>
+          </a:solidFill>
+          <a:ln>
+            <a:solidFill>
+              <a:srgbClr val="ECF2F7"/>
+            </a:solidFill>
+          </a:ln>
+        </p:spPr>
+        <p:style>
+          <a:lnRef idx="1">
+            <a:schemeClr val="accent1"/>
+          </a:lnRef>
+          <a:fillRef idx="3">
+            <a:schemeClr val="accent1"/>
+          </a:fillRef>
+          <a:effectRef idx="2">
+            <a:schemeClr val="accent1"/>
+          </a:effectRef>
+          <a:fontRef idx="minor">
+            <a:schemeClr val="lt1"/>
+          </a:fontRef>
+        </p:style>
+        <p:txBody>
+          <a:bodyPr rtlCol="0" anchor="ctr"/>
+          <a:lstStyle/>
+          <a:p>
+            <a:pPr algn="ctr"/>
+            <a:endParaRPr/>
+          </a:p>
+        </p:txBody>
+      </p:sp>
+      <p:sp>
+        <p:nvSpPr>
+          <p:cNvPr id="19" name="TextBox 18"/>
+          <p:cNvSpPr txBox="1"/>
+          <p:nvPr/>
+        </p:nvSpPr>
+        <p:spPr>
+          <a:xfrm>
+            <a:off x="667512" y="3589020"/>
+            <a:ext cx="3108960" cy="1645920"/>
+          </a:xfrm>
+          <a:prstGeom prst="rect">
+            <a:avLst/>
+          </a:prstGeom>
+          <a:noFill/>
+        </p:spPr>
+        <p:txBody>
+          <a:bodyPr wrap="none">
+            <a:spAutoFit/>
+          </a:bodyPr>
+          <a:lstStyle/>
+          <a:p>
+            <a:pPr>
+              <a:defRPr sz="1600" b="1">
+                <a:solidFill>
+                  <a:srgbClr val="1C2536"/>
+                </a:solidFill>
+              </a:defRPr>
+            </a:pPr>
+            <a:r>
+              <a:rPr dirty="0"/>
+              <a:t>Suggested next actions</a:t>
+            </a:r>
+          </a:p>
+          <a:p>
+            <a:pPr>
+              <a:defRPr sz="1200">
+                <a:solidFill>
+                  <a:srgbClr val="485563"/>
+                </a:solidFill>
+              </a:defRPr>
+            </a:pPr>
+            <a:r>
+              <a:rPr dirty="0" err="1"/>
+              <a:t>Prioritise</a:t>
+            </a:r>
+            <a:r>
+              <a:rPr dirty="0"/>
+              <a:t> retention plays for established students, where most volume sits</a:t>
+            </a:r>
+          </a:p>
+          <a:p>
+            <a:pPr>
+              <a:defRPr sz="1200">
+                <a:solidFill>
+                  <a:srgbClr val="485563"/>
+                </a:solidFill>
+              </a:defRPr>
+            </a:pPr>
+            <a:r>
+              <a:rPr dirty="0"/>
+              <a:t>Review GCSE journeys first to understand why both churn and reactivation are high</a:t>
+            </a:r>
+          </a:p>
+          <a:p>
+            <a:pPr>
+              <a:defRPr sz="1200">
+                <a:solidFill>
+                  <a:srgbClr val="485563"/>
+                </a:solidFill>
+              </a:defRPr>
+            </a:pPr>
+            <a:r>
+              <a:rPr dirty="0"/>
+              <a:t>Use tutor-level monitoring as an exception view rather than the primary lens</a:t>
             </a:r>
           </a:p>
         </p:txBody>
@@ -4236,4 +6376,319 @@
   </a:objectDefaults>
   <a:extraClrSchemeLst/>
 </a:theme>
+</file>
+
+<file path=ppt/theme/theme2.xml><?xml version="1.0" encoding="utf-8"?>
+<a:theme xmlns:a="http://schemas.openxmlformats.org/drawingml/2006/main" name="Office Theme">
+  <a:themeElements>
+    <a:clrScheme name="Office">
+      <a:dk1>
+        <a:sysClr val="windowText" lastClr="000000"/>
+      </a:dk1>
+      <a:lt1>
+        <a:sysClr val="window" lastClr="FFFFFF"/>
+      </a:lt1>
+      <a:dk2>
+        <a:srgbClr val="0E2841"/>
+      </a:dk2>
+      <a:lt2>
+        <a:srgbClr val="E8E8E8"/>
+      </a:lt2>
+      <a:accent1>
+        <a:srgbClr val="156082"/>
+      </a:accent1>
+      <a:accent2>
+        <a:srgbClr val="E97132"/>
+      </a:accent2>
+      <a:accent3>
+        <a:srgbClr val="196B24"/>
+      </a:accent3>
+      <a:accent4>
+        <a:srgbClr val="0F9ED5"/>
+      </a:accent4>
+      <a:accent5>
+        <a:srgbClr val="A02B93"/>
+      </a:accent5>
+      <a:accent6>
+        <a:srgbClr val="4EA72E"/>
+      </a:accent6>
+      <a:hlink>
+        <a:srgbClr val="467886"/>
+      </a:hlink>
+      <a:folHlink>
+        <a:srgbClr val="96607D"/>
+      </a:folHlink>
+    </a:clrScheme>
+    <a:fontScheme name="Office">
+      <a:majorFont>
+        <a:latin typeface="Aptos Display" panose="02110004020202020204"/>
+        <a:ea typeface=""/>
+        <a:cs typeface=""/>
+        <a:font script="Jpan" typeface="游ゴシック Light"/>
+        <a:font script="Hang" typeface="맑은 고딕"/>
+        <a:font script="Hans" typeface="等线 Light"/>
+        <a:font script="Hant" typeface="新細明體"/>
+        <a:font script="Arab" typeface="Times New Roman"/>
+        <a:font script="Hebr" typeface="Times New Roman"/>
+        <a:font script="Thai" typeface="Angsana New"/>
+        <a:font script="Ethi" typeface="Nyala"/>
+        <a:font script="Beng" typeface="Vrinda"/>
+        <a:font script="Gujr" typeface="Shruti"/>
+        <a:font script="Khmr" typeface="MoolBoran"/>
+        <a:font script="Knda" typeface="Tunga"/>
+        <a:font script="Guru" typeface="Raavi"/>
+        <a:font script="Cans" typeface="Euphemia"/>
+        <a:font script="Cher" typeface="Plantagenet Cherokee"/>
+        <a:font script="Yiii" typeface="Microsoft Yi Baiti"/>
+        <a:font script="Tibt" typeface="Microsoft Himalaya"/>
+        <a:font script="Thaa" typeface="MV Boli"/>
+        <a:font script="Deva" typeface="Mangal"/>
+        <a:font script="Telu" typeface="Gautami"/>
+        <a:font script="Taml" typeface="Latha"/>
+        <a:font script="Syrc" typeface="Estrangelo Edessa"/>
+        <a:font script="Orya" typeface="Kalinga"/>
+        <a:font script="Mlym" typeface="Kartika"/>
+        <a:font script="Laoo" typeface="DokChampa"/>
+        <a:font script="Sinh" typeface="Iskoola Pota"/>
+        <a:font script="Mong" typeface="Mongolian Baiti"/>
+        <a:font script="Viet" typeface="Times New Roman"/>
+        <a:font script="Uigh" typeface="Microsoft Uighur"/>
+        <a:font script="Geor" typeface="Sylfaen"/>
+        <a:font script="Armn" typeface="Arial"/>
+        <a:font script="Bugi" typeface="Leelawadee UI"/>
+        <a:font script="Bopo" typeface="Microsoft JhengHei"/>
+        <a:font script="Java" typeface="Javanese Text"/>
+        <a:font script="Lisu" typeface="Segoe UI"/>
+        <a:font script="Mymr" typeface="Myanmar Text"/>
+        <a:font script="Nkoo" typeface="Ebrima"/>
+        <a:font script="Olck" typeface="Nirmala UI"/>
+        <a:font script="Osma" typeface="Ebrima"/>
+        <a:font script="Phag" typeface="Phagspa"/>
+        <a:font script="Syrn" typeface="Estrangelo Edessa"/>
+        <a:font script="Syrj" typeface="Estrangelo Edessa"/>
+        <a:font script="Syre" typeface="Estrangelo Edessa"/>
+        <a:font script="Sora" typeface="Nirmala UI"/>
+        <a:font script="Tale" typeface="Microsoft Tai Le"/>
+        <a:font script="Talu" typeface="Microsoft New Tai Lue"/>
+        <a:font script="Tfng" typeface="Ebrima"/>
+      </a:majorFont>
+      <a:minorFont>
+        <a:latin typeface="Aptos" panose="02110004020202020204"/>
+        <a:ea typeface=""/>
+        <a:cs typeface=""/>
+        <a:font script="Jpan" typeface="游ゴシック"/>
+        <a:font script="Hang" typeface="맑은 고딕"/>
+        <a:font script="Hans" typeface="等线"/>
+        <a:font script="Hant" typeface="新細明體"/>
+        <a:font script="Arab" typeface="Arial"/>
+        <a:font script="Hebr" typeface="Arial"/>
+        <a:font script="Thai" typeface="Cordia New"/>
+        <a:font script="Ethi" typeface="Nyala"/>
+        <a:font script="Beng" typeface="Vrinda"/>
+        <a:font script="Gujr" typeface="Shruti"/>
+        <a:font script="Khmr" typeface="DaunPenh"/>
+        <a:font script="Knda" typeface="Tunga"/>
+        <a:font script="Guru" typeface="Raavi"/>
+        <a:font script="Cans" typeface="Euphemia"/>
+        <a:font script="Cher" typeface="Plantagenet Cherokee"/>
+        <a:font script="Yiii" typeface="Microsoft Yi Baiti"/>
+        <a:font script="Tibt" typeface="Microsoft Himalaya"/>
+        <a:font script="Thaa" typeface="MV Boli"/>
+        <a:font script="Deva" typeface="Mangal"/>
+        <a:font script="Telu" typeface="Gautami"/>
+        <a:font script="Taml" typeface="Latha"/>
+        <a:font script="Syrc" typeface="Estrangelo Edessa"/>
+        <a:font script="Orya" typeface="Kalinga"/>
+        <a:font script="Mlym" typeface="Kartika"/>
+        <a:font script="Laoo" typeface="DokChampa"/>
+        <a:font script="Sinh" typeface="Iskoola Pota"/>
+        <a:font script="Mong" typeface="Mongolian Baiti"/>
+        <a:font script="Viet" typeface="Arial"/>
+        <a:font script="Uigh" typeface="Microsoft Uighur"/>
+        <a:font script="Geor" typeface="Sylfaen"/>
+        <a:font script="Armn" typeface="Arial"/>
+        <a:font script="Bugi" typeface="Leelawadee UI"/>
+        <a:font script="Bopo" typeface="Microsoft JhengHei"/>
+        <a:font script="Java" typeface="Javanese Text"/>
+        <a:font script="Lisu" typeface="Segoe UI"/>
+        <a:font script="Mymr" typeface="Myanmar Text"/>
+        <a:font script="Nkoo" typeface="Ebrima"/>
+        <a:font script="Olck" typeface="Nirmala UI"/>
+        <a:font script="Osma" typeface="Ebrima"/>
+        <a:font script="Phag" typeface="Phagspa"/>
+        <a:font script="Syrn" typeface="Estrangelo Edessa"/>
+        <a:font script="Syrj" typeface="Estrangelo Edessa"/>
+        <a:font script="Syre" typeface="Estrangelo Edessa"/>
+        <a:font script="Sora" typeface="Nirmala UI"/>
+        <a:font script="Tale" typeface="Microsoft Tai Le"/>
+        <a:font script="Talu" typeface="Microsoft New Tai Lue"/>
+        <a:font script="Tfng" typeface="Ebrima"/>
+      </a:minorFont>
+    </a:fontScheme>
+    <a:fmtScheme name="Office">
+      <a:fillStyleLst>
+        <a:solidFill>
+          <a:schemeClr val="phClr"/>
+        </a:solidFill>
+        <a:gradFill rotWithShape="1">
+          <a:gsLst>
+            <a:gs pos="0">
+              <a:schemeClr val="phClr">
+                <a:lumMod val="110000"/>
+                <a:satMod val="105000"/>
+                <a:tint val="67000"/>
+              </a:schemeClr>
+            </a:gs>
+            <a:gs pos="50000">
+              <a:schemeClr val="phClr">
+                <a:lumMod val="105000"/>
+                <a:satMod val="103000"/>
+                <a:tint val="73000"/>
+              </a:schemeClr>
+            </a:gs>
+            <a:gs pos="100000">
+              <a:schemeClr val="phClr">
+                <a:lumMod val="105000"/>
+                <a:satMod val="109000"/>
+                <a:tint val="81000"/>
+              </a:schemeClr>
+            </a:gs>
+          </a:gsLst>
+          <a:lin ang="5400000" scaled="0"/>
+        </a:gradFill>
+        <a:gradFill rotWithShape="1">
+          <a:gsLst>
+            <a:gs pos="0">
+              <a:schemeClr val="phClr">
+                <a:satMod val="103000"/>
+                <a:lumMod val="102000"/>
+                <a:tint val="94000"/>
+              </a:schemeClr>
+            </a:gs>
+            <a:gs pos="50000">
+              <a:schemeClr val="phClr">
+                <a:satMod val="110000"/>
+                <a:lumMod val="100000"/>
+                <a:shade val="100000"/>
+              </a:schemeClr>
+            </a:gs>
+            <a:gs pos="100000">
+              <a:schemeClr val="phClr">
+                <a:lumMod val="99000"/>
+                <a:satMod val="120000"/>
+                <a:shade val="78000"/>
+              </a:schemeClr>
+            </a:gs>
+          </a:gsLst>
+          <a:lin ang="5400000" scaled="0"/>
+        </a:gradFill>
+      </a:fillStyleLst>
+      <a:lnStyleLst>
+        <a:ln w="12700" cap="flat" cmpd="sng" algn="ctr">
+          <a:solidFill>
+            <a:schemeClr val="phClr"/>
+          </a:solidFill>
+          <a:prstDash val="solid"/>
+          <a:miter lim="800000"/>
+        </a:ln>
+        <a:ln w="19050" cap="flat" cmpd="sng" algn="ctr">
+          <a:solidFill>
+            <a:schemeClr val="phClr"/>
+          </a:solidFill>
+          <a:prstDash val="solid"/>
+          <a:miter lim="800000"/>
+        </a:ln>
+        <a:ln w="25400" cap="flat" cmpd="sng" algn="ctr">
+          <a:solidFill>
+            <a:schemeClr val="phClr"/>
+          </a:solidFill>
+          <a:prstDash val="solid"/>
+          <a:miter lim="800000"/>
+        </a:ln>
+      </a:lnStyleLst>
+      <a:effectStyleLst>
+        <a:effectStyle>
+          <a:effectLst/>
+        </a:effectStyle>
+        <a:effectStyle>
+          <a:effectLst/>
+        </a:effectStyle>
+        <a:effectStyle>
+          <a:effectLst>
+            <a:outerShdw blurRad="57150" dist="19050" dir="5400000" algn="ctr" rotWithShape="0">
+              <a:srgbClr val="000000">
+                <a:alpha val="63000"/>
+              </a:srgbClr>
+            </a:outerShdw>
+          </a:effectLst>
+        </a:effectStyle>
+      </a:effectStyleLst>
+      <a:bgFillStyleLst>
+        <a:solidFill>
+          <a:schemeClr val="phClr"/>
+        </a:solidFill>
+        <a:solidFill>
+          <a:schemeClr val="phClr">
+            <a:tint val="95000"/>
+            <a:satMod val="170000"/>
+          </a:schemeClr>
+        </a:solidFill>
+        <a:gradFill rotWithShape="1">
+          <a:gsLst>
+            <a:gs pos="0">
+              <a:schemeClr val="phClr">
+                <a:tint val="93000"/>
+                <a:satMod val="150000"/>
+                <a:shade val="98000"/>
+                <a:lumMod val="102000"/>
+              </a:schemeClr>
+            </a:gs>
+            <a:gs pos="50000">
+              <a:schemeClr val="phClr">
+                <a:tint val="98000"/>
+                <a:satMod val="130000"/>
+                <a:shade val="90000"/>
+                <a:lumMod val="103000"/>
+              </a:schemeClr>
+            </a:gs>
+            <a:gs pos="100000">
+              <a:schemeClr val="phClr">
+                <a:shade val="63000"/>
+                <a:satMod val="120000"/>
+              </a:schemeClr>
+            </a:gs>
+          </a:gsLst>
+          <a:lin ang="5400000" scaled="0"/>
+        </a:gradFill>
+      </a:bgFillStyleLst>
+    </a:fmtScheme>
+  </a:themeElements>
+  <a:objectDefaults>
+    <a:lnDef>
+      <a:spPr/>
+      <a:bodyPr/>
+      <a:lstStyle/>
+      <a:style>
+        <a:lnRef idx="2">
+          <a:schemeClr val="accent1"/>
+        </a:lnRef>
+        <a:fillRef idx="0">
+          <a:schemeClr val="accent1"/>
+        </a:fillRef>
+        <a:effectRef idx="1">
+          <a:schemeClr val="accent1"/>
+        </a:effectRef>
+        <a:fontRef idx="minor">
+          <a:schemeClr val="tx1"/>
+        </a:fontRef>
+      </a:style>
+    </a:lnDef>
+  </a:objectDefaults>
+  <a:extraClrSchemeLst/>
+  <a:extLst>
+    <a:ext uri="{05A4C25C-085E-4340-85A3-A5531E510DB2}">
+      <thm15:themeFamily xmlns:thm15="http://schemas.microsoft.com/office/thememl/2012/main" name="Office Theme" id="{2E142A2C-CD16-42D6-873A-C26D2A0506FA}" vid="{1BDDFF52-6CD6-40A5-AB3C-68EB2F1E4D0A}"/>
+    </a:ext>
+  </a:extLst>
+</a:theme>
 </file>